--- a/Artifacts/Presentation.pptx
+++ b/Artifacts/Presentation.pptx
@@ -9,6 +9,7 @@
     <p:sldId id="257" r:id="rId3"/>
     <p:sldId id="258" r:id="rId4"/>
     <p:sldId id="259" r:id="rId5"/>
+    <p:sldId id="260" r:id="rId6"/>
   </p:sldIdLst>
   <p:sldSz cx="12192000" cy="6858000"/>
   <p:notesSz cx="6858000" cy="9144000"/>
@@ -3600,10 +3601,10 @@
       </p:grpSpPr>
       <p:pic>
         <p:nvPicPr>
-          <p:cNvPr id="3" name="Рисунок 2" descr="Изображение выглядит как карта&#10;&#10;Автоматически созданное описание">
-            <a:extLst>
-              <a:ext uri="{FF2B5EF4-FFF2-40B4-BE49-F238E27FC236}">
-                <a16:creationId xmlns:a16="http://schemas.microsoft.com/office/drawing/2014/main" id="{CFB63E6B-09D4-4AF6-AD78-157238596965}"/>
+          <p:cNvPr id="5" name="Рисунок 4" descr="Изображение выглядит как карта&#10;&#10;Автоматически созданное описание">
+            <a:extLst>
+              <a:ext uri="{FF2B5EF4-FFF2-40B4-BE49-F238E27FC236}">
+                <a16:creationId xmlns:a16="http://schemas.microsoft.com/office/drawing/2014/main" id="{703088B6-0E56-489B-82A4-CEE62275CE1B}"/>
               </a:ext>
             </a:extLst>
           </p:cNvPr>
@@ -3638,6 +3639,72 @@
     <p:extLst>
       <p:ext uri="{BB962C8B-B14F-4D97-AF65-F5344CB8AC3E}">
         <p14:creationId xmlns:p14="http://schemas.microsoft.com/office/powerpoint/2010/main" val="743655764"/>
+      </p:ext>
+    </p:extLst>
+  </p:cSld>
+  <p:clrMapOvr>
+    <a:masterClrMapping/>
+  </p:clrMapOvr>
+</p:sld>
+</file>
+
+<file path=ppt/slides/slide5.xml><?xml version="1.0" encoding="utf-8"?>
+<p:sld xmlns:a="http://schemas.openxmlformats.org/drawingml/2006/main" xmlns:r="http://schemas.openxmlformats.org/officeDocument/2006/relationships" xmlns:p="http://schemas.openxmlformats.org/presentationml/2006/main">
+  <p:cSld>
+    <p:spTree>
+      <p:nvGrpSpPr>
+        <p:cNvPr id="1" name=""/>
+        <p:cNvGrpSpPr/>
+        <p:nvPr/>
+      </p:nvGrpSpPr>
+      <p:grpSpPr>
+        <a:xfrm>
+          <a:off x="0" y="0"/>
+          <a:ext cx="0" cy="0"/>
+          <a:chOff x="0" y="0"/>
+          <a:chExt cx="0" cy="0"/>
+        </a:xfrm>
+      </p:grpSpPr>
+      <p:pic>
+        <p:nvPicPr>
+          <p:cNvPr id="4" name="Рисунок 3" descr="Изображение выглядит как карта&#10;&#10;Автоматически созданное описание">
+            <a:extLst>
+              <a:ext uri="{FF2B5EF4-FFF2-40B4-BE49-F238E27FC236}">
+                <a16:creationId xmlns:a16="http://schemas.microsoft.com/office/drawing/2014/main" id="{17C10F0C-6BB0-4224-BBAB-879BEFD5CB28}"/>
+              </a:ext>
+            </a:extLst>
+          </p:cNvPr>
+          <p:cNvPicPr>
+            <a:picLocks noChangeAspect="1"/>
+          </p:cNvPicPr>
+          <p:nvPr/>
+        </p:nvPicPr>
+        <p:blipFill>
+          <a:blip r:embed="rId2">
+            <a:extLst>
+              <a:ext uri="{28A0092B-C50C-407E-A947-70E740481C1C}">
+                <a14:useLocalDpi xmlns:a14="http://schemas.microsoft.com/office/drawing/2010/main" val="0"/>
+              </a:ext>
+            </a:extLst>
+          </a:blip>
+          <a:stretch>
+            <a:fillRect/>
+          </a:stretch>
+        </p:blipFill>
+        <p:spPr>
+          <a:xfrm>
+            <a:off x="1328737" y="423862"/>
+            <a:ext cx="9534525" cy="6010275"/>
+          </a:xfrm>
+          <a:prstGeom prst="rect">
+            <a:avLst/>
+          </a:prstGeom>
+        </p:spPr>
+      </p:pic>
+    </p:spTree>
+    <p:extLst>
+      <p:ext uri="{BB962C8B-B14F-4D97-AF65-F5344CB8AC3E}">
+        <p14:creationId xmlns:p14="http://schemas.microsoft.com/office/powerpoint/2010/main" val="1009295973"/>
       </p:ext>
     </p:extLst>
   </p:cSld>

--- a/Artifacts/Presentation.pptx
+++ b/Artifacts/Presentation.pptx
@@ -7,9 +7,11 @@
   <p:sldIdLst>
     <p:sldId id="256" r:id="rId2"/>
     <p:sldId id="257" r:id="rId3"/>
-    <p:sldId id="258" r:id="rId4"/>
-    <p:sldId id="259" r:id="rId5"/>
-    <p:sldId id="260" r:id="rId6"/>
+    <p:sldId id="262" r:id="rId4"/>
+    <p:sldId id="258" r:id="rId5"/>
+    <p:sldId id="259" r:id="rId6"/>
+    <p:sldId id="261" r:id="rId7"/>
+    <p:sldId id="260" r:id="rId8"/>
   </p:sldIdLst>
   <p:sldSz cx="12192000" cy="6858000"/>
   <p:notesSz cx="6858000" cy="9144000"/>
@@ -3533,6 +3535,330 @@
           <a:chExt cx="0" cy="0"/>
         </a:xfrm>
       </p:grpSpPr>
+      <p:sp>
+        <p:nvSpPr>
+          <p:cNvPr id="2" name="Заголовок 1">
+            <a:extLst>
+              <a:ext uri="{FF2B5EF4-FFF2-40B4-BE49-F238E27FC236}">
+                <a16:creationId xmlns:a16="http://schemas.microsoft.com/office/drawing/2014/main" id="{9A4C5A48-F6E7-41AC-9F97-011E071E4C05}"/>
+              </a:ext>
+            </a:extLst>
+          </p:cNvPr>
+          <p:cNvSpPr txBox="1">
+            <a:spLocks/>
+          </p:cNvSpPr>
+          <p:nvPr/>
+        </p:nvSpPr>
+        <p:spPr>
+          <a:xfrm>
+            <a:off x="838200" y="245382"/>
+            <a:ext cx="10515600" cy="1325563"/>
+          </a:xfrm>
+          <a:prstGeom prst="rect">
+            <a:avLst/>
+          </a:prstGeom>
+        </p:spPr>
+        <p:txBody>
+          <a:bodyPr vert="horz" lIns="91440" tIns="45720" rIns="91440" bIns="45720" rtlCol="0" anchor="ctr">
+            <a:normAutofit/>
+          </a:bodyPr>
+          <a:lstStyle>
+            <a:lvl1pPr algn="l" defTabSz="914400" rtl="0" eaLnBrk="1" latinLnBrk="0" hangingPunct="1">
+              <a:lnSpc>
+                <a:spcPct val="90000"/>
+              </a:lnSpc>
+              <a:spcBef>
+                <a:spcPct val="0"/>
+              </a:spcBef>
+              <a:buNone/>
+              <a:defRPr sz="4400" kern="1200">
+                <a:solidFill>
+                  <a:schemeClr val="tx1"/>
+                </a:solidFill>
+                <a:latin typeface="+mj-lt"/>
+                <a:ea typeface="+mj-ea"/>
+                <a:cs typeface="+mj-cs"/>
+              </a:defRPr>
+            </a:lvl1pPr>
+          </a:lstStyle>
+          <a:p>
+            <a:pPr algn="ctr"/>
+            <a:r>
+              <a:rPr lang="ru-RU" b="1" dirty="0"/>
+              <a:t>Технологии</a:t>
+            </a:r>
+          </a:p>
+        </p:txBody>
+      </p:sp>
+      <p:sp>
+        <p:nvSpPr>
+          <p:cNvPr id="3" name="Объект 2">
+            <a:extLst>
+              <a:ext uri="{FF2B5EF4-FFF2-40B4-BE49-F238E27FC236}">
+                <a16:creationId xmlns:a16="http://schemas.microsoft.com/office/drawing/2014/main" id="{1A2A8E83-1D25-42E2-BD3F-D8011C6FF4B8}"/>
+              </a:ext>
+            </a:extLst>
+          </p:cNvPr>
+          <p:cNvSpPr txBox="1">
+            <a:spLocks/>
+          </p:cNvSpPr>
+          <p:nvPr/>
+        </p:nvSpPr>
+        <p:spPr>
+          <a:xfrm>
+            <a:off x="838200" y="1825625"/>
+            <a:ext cx="10515600" cy="4351338"/>
+          </a:xfrm>
+          <a:prstGeom prst="rect">
+            <a:avLst/>
+          </a:prstGeom>
+        </p:spPr>
+        <p:txBody>
+          <a:bodyPr vert="horz" lIns="91440" tIns="45720" rIns="91440" bIns="45720" rtlCol="0">
+            <a:normAutofit/>
+          </a:bodyPr>
+          <a:lstStyle>
+            <a:lvl1pPr marL="228600" indent="-228600" algn="l" defTabSz="914400" rtl="0" eaLnBrk="1" latinLnBrk="0" hangingPunct="1">
+              <a:lnSpc>
+                <a:spcPct val="90000"/>
+              </a:lnSpc>
+              <a:spcBef>
+                <a:spcPts val="1000"/>
+              </a:spcBef>
+              <a:buFont typeface="Arial" panose="020B0604020202020204" pitchFamily="34" charset="0"/>
+              <a:buChar char="•"/>
+              <a:defRPr sz="2800" kern="1200">
+                <a:solidFill>
+                  <a:schemeClr val="tx1"/>
+                </a:solidFill>
+                <a:latin typeface="+mn-lt"/>
+                <a:ea typeface="+mn-ea"/>
+                <a:cs typeface="+mn-cs"/>
+              </a:defRPr>
+            </a:lvl1pPr>
+            <a:lvl2pPr marL="685800" indent="-228600" algn="l" defTabSz="914400" rtl="0" eaLnBrk="1" latinLnBrk="0" hangingPunct="1">
+              <a:lnSpc>
+                <a:spcPct val="90000"/>
+              </a:lnSpc>
+              <a:spcBef>
+                <a:spcPts val="500"/>
+              </a:spcBef>
+              <a:buFont typeface="Arial" panose="020B0604020202020204" pitchFamily="34" charset="0"/>
+              <a:buChar char="•"/>
+              <a:defRPr sz="2400" kern="1200">
+                <a:solidFill>
+                  <a:schemeClr val="tx1"/>
+                </a:solidFill>
+                <a:latin typeface="+mn-lt"/>
+                <a:ea typeface="+mn-ea"/>
+                <a:cs typeface="+mn-cs"/>
+              </a:defRPr>
+            </a:lvl2pPr>
+            <a:lvl3pPr marL="1143000" indent="-228600" algn="l" defTabSz="914400" rtl="0" eaLnBrk="1" latinLnBrk="0" hangingPunct="1">
+              <a:lnSpc>
+                <a:spcPct val="90000"/>
+              </a:lnSpc>
+              <a:spcBef>
+                <a:spcPts val="500"/>
+              </a:spcBef>
+              <a:buFont typeface="Arial" panose="020B0604020202020204" pitchFamily="34" charset="0"/>
+              <a:buChar char="•"/>
+              <a:defRPr sz="2000" kern="1200">
+                <a:solidFill>
+                  <a:schemeClr val="tx1"/>
+                </a:solidFill>
+                <a:latin typeface="+mn-lt"/>
+                <a:ea typeface="+mn-ea"/>
+                <a:cs typeface="+mn-cs"/>
+              </a:defRPr>
+            </a:lvl3pPr>
+            <a:lvl4pPr marL="1600200" indent="-228600" algn="l" defTabSz="914400" rtl="0" eaLnBrk="1" latinLnBrk="0" hangingPunct="1">
+              <a:lnSpc>
+                <a:spcPct val="90000"/>
+              </a:lnSpc>
+              <a:spcBef>
+                <a:spcPts val="500"/>
+              </a:spcBef>
+              <a:buFont typeface="Arial" panose="020B0604020202020204" pitchFamily="34" charset="0"/>
+              <a:buChar char="•"/>
+              <a:defRPr sz="1800" kern="1200">
+                <a:solidFill>
+                  <a:schemeClr val="tx1"/>
+                </a:solidFill>
+                <a:latin typeface="+mn-lt"/>
+                <a:ea typeface="+mn-ea"/>
+                <a:cs typeface="+mn-cs"/>
+              </a:defRPr>
+            </a:lvl4pPr>
+            <a:lvl5pPr marL="2057400" indent="-228600" algn="l" defTabSz="914400" rtl="0" eaLnBrk="1" latinLnBrk="0" hangingPunct="1">
+              <a:lnSpc>
+                <a:spcPct val="90000"/>
+              </a:lnSpc>
+              <a:spcBef>
+                <a:spcPts val="500"/>
+              </a:spcBef>
+              <a:buFont typeface="Arial" panose="020B0604020202020204" pitchFamily="34" charset="0"/>
+              <a:buChar char="•"/>
+              <a:defRPr sz="1800" kern="1200">
+                <a:solidFill>
+                  <a:schemeClr val="tx1"/>
+                </a:solidFill>
+                <a:latin typeface="+mn-lt"/>
+                <a:ea typeface="+mn-ea"/>
+                <a:cs typeface="+mn-cs"/>
+              </a:defRPr>
+            </a:lvl5pPr>
+            <a:lvl6pPr marL="2514600" indent="-228600" algn="l" defTabSz="914400" rtl="0" eaLnBrk="1" latinLnBrk="0" hangingPunct="1">
+              <a:lnSpc>
+                <a:spcPct val="90000"/>
+              </a:lnSpc>
+              <a:spcBef>
+                <a:spcPts val="500"/>
+              </a:spcBef>
+              <a:buFont typeface="Arial" panose="020B0604020202020204" pitchFamily="34" charset="0"/>
+              <a:buChar char="•"/>
+              <a:defRPr sz="1800" kern="1200">
+                <a:solidFill>
+                  <a:schemeClr val="tx1"/>
+                </a:solidFill>
+                <a:latin typeface="+mn-lt"/>
+                <a:ea typeface="+mn-ea"/>
+                <a:cs typeface="+mn-cs"/>
+              </a:defRPr>
+            </a:lvl6pPr>
+            <a:lvl7pPr marL="2971800" indent="-228600" algn="l" defTabSz="914400" rtl="0" eaLnBrk="1" latinLnBrk="0" hangingPunct="1">
+              <a:lnSpc>
+                <a:spcPct val="90000"/>
+              </a:lnSpc>
+              <a:spcBef>
+                <a:spcPts val="500"/>
+              </a:spcBef>
+              <a:buFont typeface="Arial" panose="020B0604020202020204" pitchFamily="34" charset="0"/>
+              <a:buChar char="•"/>
+              <a:defRPr sz="1800" kern="1200">
+                <a:solidFill>
+                  <a:schemeClr val="tx1"/>
+                </a:solidFill>
+                <a:latin typeface="+mn-lt"/>
+                <a:ea typeface="+mn-ea"/>
+                <a:cs typeface="+mn-cs"/>
+              </a:defRPr>
+            </a:lvl7pPr>
+            <a:lvl8pPr marL="3429000" indent="-228600" algn="l" defTabSz="914400" rtl="0" eaLnBrk="1" latinLnBrk="0" hangingPunct="1">
+              <a:lnSpc>
+                <a:spcPct val="90000"/>
+              </a:lnSpc>
+              <a:spcBef>
+                <a:spcPts val="500"/>
+              </a:spcBef>
+              <a:buFont typeface="Arial" panose="020B0604020202020204" pitchFamily="34" charset="0"/>
+              <a:buChar char="•"/>
+              <a:defRPr sz="1800" kern="1200">
+                <a:solidFill>
+                  <a:schemeClr val="tx1"/>
+                </a:solidFill>
+                <a:latin typeface="+mn-lt"/>
+                <a:ea typeface="+mn-ea"/>
+                <a:cs typeface="+mn-cs"/>
+              </a:defRPr>
+            </a:lvl8pPr>
+            <a:lvl9pPr marL="3886200" indent="-228600" algn="l" defTabSz="914400" rtl="0" eaLnBrk="1" latinLnBrk="0" hangingPunct="1">
+              <a:lnSpc>
+                <a:spcPct val="90000"/>
+              </a:lnSpc>
+              <a:spcBef>
+                <a:spcPts val="500"/>
+              </a:spcBef>
+              <a:buFont typeface="Arial" panose="020B0604020202020204" pitchFamily="34" charset="0"/>
+              <a:buChar char="•"/>
+              <a:defRPr sz="1800" kern="1200">
+                <a:solidFill>
+                  <a:schemeClr val="tx1"/>
+                </a:solidFill>
+                <a:latin typeface="+mn-lt"/>
+                <a:ea typeface="+mn-ea"/>
+                <a:cs typeface="+mn-cs"/>
+              </a:defRPr>
+            </a:lvl9pPr>
+          </a:lstStyle>
+          <a:p>
+            <a:r>
+              <a:rPr lang="en-US" dirty="0"/>
+              <a:t> Angular</a:t>
+            </a:r>
+          </a:p>
+          <a:p>
+            <a:r>
+              <a:rPr lang="en-US" dirty="0"/>
+              <a:t> </a:t>
+            </a:r>
+            <a:r>
+              <a:rPr lang="en-US" dirty="0" err="1"/>
+              <a:t>WebApi</a:t>
+            </a:r>
+            <a:endParaRPr lang="en-US" dirty="0"/>
+          </a:p>
+          <a:p>
+            <a:r>
+              <a:rPr lang="en-US" dirty="0"/>
+              <a:t> Less</a:t>
+            </a:r>
+          </a:p>
+          <a:p>
+            <a:r>
+              <a:rPr lang="en-US" dirty="0"/>
+              <a:t> </a:t>
+            </a:r>
+            <a:r>
+              <a:rPr lang="en-US" dirty="0" err="1"/>
+              <a:t>SignalR</a:t>
+            </a:r>
+            <a:endParaRPr lang="en-US" dirty="0"/>
+          </a:p>
+          <a:p>
+            <a:r>
+              <a:rPr lang="en-US" dirty="0"/>
+              <a:t> Docker</a:t>
+            </a:r>
+          </a:p>
+          <a:p>
+            <a:r>
+              <a:rPr lang="en-US" dirty="0"/>
+              <a:t> Docker Compose</a:t>
+            </a:r>
+          </a:p>
+        </p:txBody>
+      </p:sp>
+    </p:spTree>
+    <p:extLst>
+      <p:ext uri="{BB962C8B-B14F-4D97-AF65-F5344CB8AC3E}">
+        <p14:creationId xmlns:p14="http://schemas.microsoft.com/office/powerpoint/2010/main" val="2368380244"/>
+      </p:ext>
+    </p:extLst>
+  </p:cSld>
+  <p:clrMapOvr>
+    <a:masterClrMapping/>
+  </p:clrMapOvr>
+</p:sld>
+</file>
+
+<file path=ppt/slides/slide4.xml><?xml version="1.0" encoding="utf-8"?>
+<p:sld xmlns:a="http://schemas.openxmlformats.org/drawingml/2006/main" xmlns:r="http://schemas.openxmlformats.org/officeDocument/2006/relationships" xmlns:p="http://schemas.openxmlformats.org/presentationml/2006/main">
+  <p:cSld>
+    <p:spTree>
+      <p:nvGrpSpPr>
+        <p:cNvPr id="1" name=""/>
+        <p:cNvGrpSpPr/>
+        <p:nvPr/>
+      </p:nvGrpSpPr>
+      <p:grpSpPr>
+        <a:xfrm>
+          <a:off x="0" y="0"/>
+          <a:ext cx="0" cy="0"/>
+          <a:chOff x="0" y="0"/>
+          <a:chExt cx="0" cy="0"/>
+        </a:xfrm>
+      </p:grpSpPr>
       <p:pic>
         <p:nvPicPr>
           <p:cNvPr id="3" name="Рисунок 2" descr="Изображение выглядит как текст, карта&#10;&#10;Автоматически созданное описание">
@@ -3582,7 +3908,7 @@
 </p:sld>
 </file>
 
-<file path=ppt/slides/slide4.xml><?xml version="1.0" encoding="utf-8"?>
+<file path=ppt/slides/slide5.xml><?xml version="1.0" encoding="utf-8"?>
 <p:sld xmlns:a="http://schemas.openxmlformats.org/drawingml/2006/main" xmlns:r="http://schemas.openxmlformats.org/officeDocument/2006/relationships" xmlns:p="http://schemas.openxmlformats.org/presentationml/2006/main">
   <p:cSld>
     <p:spTree>
@@ -3648,7 +3974,73 @@
 </p:sld>
 </file>
 
-<file path=ppt/slides/slide5.xml><?xml version="1.0" encoding="utf-8"?>
+<file path=ppt/slides/slide6.xml><?xml version="1.0" encoding="utf-8"?>
+<p:sld xmlns:a="http://schemas.openxmlformats.org/drawingml/2006/main" xmlns:r="http://schemas.openxmlformats.org/officeDocument/2006/relationships" xmlns:p="http://schemas.openxmlformats.org/presentationml/2006/main">
+  <p:cSld>
+    <p:spTree>
+      <p:nvGrpSpPr>
+        <p:cNvPr id="1" name=""/>
+        <p:cNvGrpSpPr/>
+        <p:nvPr/>
+      </p:nvGrpSpPr>
+      <p:grpSpPr>
+        <a:xfrm>
+          <a:off x="0" y="0"/>
+          <a:ext cx="0" cy="0"/>
+          <a:chOff x="0" y="0"/>
+          <a:chExt cx="0" cy="0"/>
+        </a:xfrm>
+      </p:grpSpPr>
+      <p:pic>
+        <p:nvPicPr>
+          <p:cNvPr id="3" name="Рисунок 2" descr="Изображение выглядит как снимок экрана, карта&#10;&#10;Автоматически созданное описание">
+            <a:extLst>
+              <a:ext uri="{FF2B5EF4-FFF2-40B4-BE49-F238E27FC236}">
+                <a16:creationId xmlns:a16="http://schemas.microsoft.com/office/drawing/2014/main" id="{4D4CB138-DF5A-467E-9DF0-FB3D37F527C9}"/>
+              </a:ext>
+            </a:extLst>
+          </p:cNvPr>
+          <p:cNvPicPr>
+            <a:picLocks noChangeAspect="1"/>
+          </p:cNvPicPr>
+          <p:nvPr/>
+        </p:nvPicPr>
+        <p:blipFill>
+          <a:blip r:embed="rId2">
+            <a:extLst>
+              <a:ext uri="{28A0092B-C50C-407E-A947-70E740481C1C}">
+                <a14:useLocalDpi xmlns:a14="http://schemas.microsoft.com/office/drawing/2010/main" val="0"/>
+              </a:ext>
+            </a:extLst>
+          </a:blip>
+          <a:stretch>
+            <a:fillRect/>
+          </a:stretch>
+        </p:blipFill>
+        <p:spPr>
+          <a:xfrm>
+            <a:off x="1328737" y="423862"/>
+            <a:ext cx="9534525" cy="6010275"/>
+          </a:xfrm>
+          <a:prstGeom prst="rect">
+            <a:avLst/>
+          </a:prstGeom>
+        </p:spPr>
+      </p:pic>
+    </p:spTree>
+    <p:extLst>
+      <p:ext uri="{BB962C8B-B14F-4D97-AF65-F5344CB8AC3E}">
+        <p14:creationId xmlns:p14="http://schemas.microsoft.com/office/powerpoint/2010/main" val="868582288"/>
+      </p:ext>
+    </p:extLst>
+  </p:cSld>
+  <p:clrMapOvr>
+    <a:masterClrMapping/>
+  </p:clrMapOvr>
+</p:sld>
+</file>
+
+<file path=ppt/slides/slide7.xml><?xml version="1.0" encoding="utf-8"?>
 <p:sld xmlns:a="http://schemas.openxmlformats.org/drawingml/2006/main" xmlns:r="http://schemas.openxmlformats.org/officeDocument/2006/relationships" xmlns:p="http://schemas.openxmlformats.org/presentationml/2006/main">
   <p:cSld>
     <p:spTree>

--- a/Artifacts/Presentation.pptx
+++ b/Artifacts/Presentation.pptx
@@ -12,6 +12,8 @@
     <p:sldId id="259" r:id="rId6"/>
     <p:sldId id="261" r:id="rId7"/>
     <p:sldId id="260" r:id="rId8"/>
+    <p:sldId id="263" r:id="rId9"/>
+    <p:sldId id="264" r:id="rId10"/>
   </p:sldIdLst>
   <p:sldSz cx="12192000" cy="6858000"/>
   <p:notesSz cx="6858000" cy="9144000"/>
@@ -110,6 +112,11 @@
       </a:defRPr>
     </a:lvl9pPr>
   </p:defaultTextStyle>
+  <p:extLst>
+    <p:ext uri="{EFAFB233-063F-42B5-8137-9DF3F51BA10A}">
+      <p15:sldGuideLst xmlns:p15="http://schemas.microsoft.com/office/powerpoint/2012/main"/>
+    </p:ext>
+  </p:extLst>
 </p:presentation>
 </file>
 
@@ -3493,15 +3500,9 @@
             </a:r>
             <a:r>
               <a:rPr lang="ru-RU" dirty="0"/>
-              <a:t> Система предоставляет механизм управления статьями, такие создание, редактирование и удаление статьи. Пользователям, не являющиеся сотрудниками компании предоставляется доступ к статьям в режиме чтения. Обратная связь осуществляется через механизм комментариев.</a:t>
+              <a:t> Система предоставляет механизм управления статьями: создание, редактирование и удаление статьи. Пользователям, не являющиеся сотрудниками компании предоставляется доступ к статьям в режиме чтения. Обратная связь осуществляется через механизм комментариев. В данном проекте не реализована ролевая модель управления, считается, что авторизованный пользователь является сотрудником.</a:t>
             </a:r>
             <a:endParaRPr lang="en-US" dirty="0"/>
-          </a:p>
-          <a:p>
-            <a:pPr marL="0" indent="0">
-              <a:buNone/>
-            </a:pPr>
-            <a:endParaRPr lang="ru-RU" dirty="0"/>
           </a:p>
         </p:txBody>
       </p:sp>
@@ -4097,6 +4098,265 @@
     <p:extLst>
       <p:ext uri="{BB962C8B-B14F-4D97-AF65-F5344CB8AC3E}">
         <p14:creationId xmlns:p14="http://schemas.microsoft.com/office/powerpoint/2010/main" val="1009295973"/>
+      </p:ext>
+    </p:extLst>
+  </p:cSld>
+  <p:clrMapOvr>
+    <a:masterClrMapping/>
+  </p:clrMapOvr>
+</p:sld>
+</file>
+
+<file path=ppt/slides/slide8.xml><?xml version="1.0" encoding="utf-8"?>
+<p:sld xmlns:a="http://schemas.openxmlformats.org/drawingml/2006/main" xmlns:r="http://schemas.openxmlformats.org/officeDocument/2006/relationships" xmlns:p="http://schemas.openxmlformats.org/presentationml/2006/main">
+  <p:cSld>
+    <p:spTree>
+      <p:nvGrpSpPr>
+        <p:cNvPr id="1" name=""/>
+        <p:cNvGrpSpPr/>
+        <p:nvPr/>
+      </p:nvGrpSpPr>
+      <p:grpSpPr>
+        <a:xfrm>
+          <a:off x="0" y="0"/>
+          <a:ext cx="0" cy="0"/>
+          <a:chOff x="0" y="0"/>
+          <a:chExt cx="0" cy="0"/>
+        </a:xfrm>
+      </p:grpSpPr>
+      <p:sp>
+        <p:nvSpPr>
+          <p:cNvPr id="4" name="Заголовок 1">
+            <a:extLst>
+              <a:ext uri="{FF2B5EF4-FFF2-40B4-BE49-F238E27FC236}">
+                <a16:creationId xmlns:a16="http://schemas.microsoft.com/office/drawing/2014/main" id="{2DD2FC29-EFA1-446E-A34F-3645588B21EB}"/>
+              </a:ext>
+            </a:extLst>
+          </p:cNvPr>
+          <p:cNvSpPr txBox="1">
+            <a:spLocks/>
+          </p:cNvSpPr>
+          <p:nvPr/>
+        </p:nvSpPr>
+        <p:spPr>
+          <a:xfrm>
+            <a:off x="1524000" y="1108364"/>
+            <a:ext cx="9144000" cy="2401599"/>
+          </a:xfrm>
+          <a:prstGeom prst="rect">
+            <a:avLst/>
+          </a:prstGeom>
+        </p:spPr>
+        <p:txBody>
+          <a:bodyPr vert="horz" lIns="91440" tIns="45720" rIns="91440" bIns="45720" rtlCol="0" anchor="b">
+            <a:normAutofit/>
+          </a:bodyPr>
+          <a:lstStyle>
+            <a:lvl1pPr algn="ctr" defTabSz="914400" rtl="0" eaLnBrk="1" latinLnBrk="0" hangingPunct="1">
+              <a:lnSpc>
+                <a:spcPct val="90000"/>
+              </a:lnSpc>
+              <a:spcBef>
+                <a:spcPct val="0"/>
+              </a:spcBef>
+              <a:buNone/>
+              <a:defRPr sz="6000" kern="1200">
+                <a:solidFill>
+                  <a:schemeClr val="tx1"/>
+                </a:solidFill>
+                <a:latin typeface="+mj-lt"/>
+                <a:ea typeface="+mj-ea"/>
+                <a:cs typeface="+mj-cs"/>
+              </a:defRPr>
+            </a:lvl1pPr>
+          </a:lstStyle>
+          <a:p>
+            <a:r>
+              <a:rPr lang="ru-RU" dirty="0"/>
+              <a:t>Демонстрация</a:t>
+            </a:r>
+          </a:p>
+        </p:txBody>
+      </p:sp>
+      <p:sp>
+        <p:nvSpPr>
+          <p:cNvPr id="5" name="Подзаголовок 2">
+            <a:extLst>
+              <a:ext uri="{FF2B5EF4-FFF2-40B4-BE49-F238E27FC236}">
+                <a16:creationId xmlns:a16="http://schemas.microsoft.com/office/drawing/2014/main" id="{D8193A43-38DC-4470-961D-7A1CA927806A}"/>
+              </a:ext>
+            </a:extLst>
+          </p:cNvPr>
+          <p:cNvSpPr>
+            <a:spLocks noGrp="1"/>
+          </p:cNvSpPr>
+          <p:nvPr>
+            <p:ph type="subTitle" idx="1"/>
+          </p:nvPr>
+        </p:nvSpPr>
+        <p:spPr>
+          <a:xfrm>
+            <a:off x="3657600" y="5429251"/>
+            <a:ext cx="8215313" cy="1074160"/>
+          </a:xfrm>
+        </p:spPr>
+        <p:txBody>
+          <a:bodyPr>
+            <a:normAutofit/>
+          </a:bodyPr>
+          <a:lstStyle/>
+          <a:p>
+            <a:pPr algn="r"/>
+            <a:r>
+              <a:rPr lang="ru-RU" dirty="0">
+                <a:solidFill>
+                  <a:schemeClr val="tx1">
+                    <a:lumMod val="65000"/>
+                    <a:lumOff val="35000"/>
+                  </a:schemeClr>
+                </a:solidFill>
+              </a:rPr>
+              <a:t>Исходный код</a:t>
+            </a:r>
+          </a:p>
+          <a:p>
+            <a:r>
+              <a:rPr lang="en-US" dirty="0">
+                <a:solidFill>
+                  <a:schemeClr val="tx1">
+                    <a:lumMod val="65000"/>
+                    <a:lumOff val="35000"/>
+                  </a:schemeClr>
+                </a:solidFill>
+              </a:rPr>
+              <a:t> https://github.com/HelenMakarchuk/Infotecs.Tasks/tree/Task_3</a:t>
+            </a:r>
+            <a:endParaRPr lang="ru-RU" dirty="0">
+              <a:solidFill>
+                <a:schemeClr val="tx1">
+                  <a:lumMod val="65000"/>
+                  <a:lumOff val="35000"/>
+                </a:schemeClr>
+              </a:solidFill>
+            </a:endParaRPr>
+          </a:p>
+        </p:txBody>
+      </p:sp>
+    </p:spTree>
+    <p:extLst>
+      <p:ext uri="{BB962C8B-B14F-4D97-AF65-F5344CB8AC3E}">
+        <p14:creationId xmlns:p14="http://schemas.microsoft.com/office/powerpoint/2010/main" val="4276060509"/>
+      </p:ext>
+    </p:extLst>
+  </p:cSld>
+  <p:clrMapOvr>
+    <a:masterClrMapping/>
+  </p:clrMapOvr>
+</p:sld>
+</file>
+
+<file path=ppt/slides/slide9.xml><?xml version="1.0" encoding="utf-8"?>
+<p:sld xmlns:a="http://schemas.openxmlformats.org/drawingml/2006/main" xmlns:r="http://schemas.openxmlformats.org/officeDocument/2006/relationships" xmlns:p="http://schemas.openxmlformats.org/presentationml/2006/main">
+  <p:cSld>
+    <p:spTree>
+      <p:nvGrpSpPr>
+        <p:cNvPr id="1" name=""/>
+        <p:cNvGrpSpPr/>
+        <p:nvPr/>
+      </p:nvGrpSpPr>
+      <p:grpSpPr>
+        <a:xfrm>
+          <a:off x="0" y="0"/>
+          <a:ext cx="0" cy="0"/>
+          <a:chOff x="0" y="0"/>
+          <a:chExt cx="0" cy="0"/>
+        </a:xfrm>
+      </p:grpSpPr>
+      <p:sp>
+        <p:nvSpPr>
+          <p:cNvPr id="2" name="Заголовок 1">
+            <a:extLst>
+              <a:ext uri="{FF2B5EF4-FFF2-40B4-BE49-F238E27FC236}">
+                <a16:creationId xmlns:a16="http://schemas.microsoft.com/office/drawing/2014/main" id="{5EBADAB6-E74B-4A07-9FCF-487C056E0FA8}"/>
+              </a:ext>
+            </a:extLst>
+          </p:cNvPr>
+          <p:cNvSpPr>
+            <a:spLocks noGrp="1"/>
+          </p:cNvSpPr>
+          <p:nvPr>
+            <p:ph type="ctrTitle"/>
+          </p:nvPr>
+        </p:nvSpPr>
+        <p:spPr>
+          <a:xfrm>
+            <a:off x="1524000" y="1108364"/>
+            <a:ext cx="9144000" cy="2401599"/>
+          </a:xfrm>
+        </p:spPr>
+        <p:txBody>
+          <a:bodyPr/>
+          <a:lstStyle/>
+          <a:p>
+            <a:r>
+              <a:rPr lang="ru-RU" dirty="0"/>
+              <a:t>Спасибо</a:t>
+            </a:r>
+          </a:p>
+        </p:txBody>
+      </p:sp>
+      <p:sp>
+        <p:nvSpPr>
+          <p:cNvPr id="3" name="Подзаголовок 2">
+            <a:extLst>
+              <a:ext uri="{FF2B5EF4-FFF2-40B4-BE49-F238E27FC236}">
+                <a16:creationId xmlns:a16="http://schemas.microsoft.com/office/drawing/2014/main" id="{77A894F1-5EE0-4426-86C4-DD7843F95E2C}"/>
+              </a:ext>
+            </a:extLst>
+          </p:cNvPr>
+          <p:cNvSpPr>
+            <a:spLocks noGrp="1"/>
+          </p:cNvSpPr>
+          <p:nvPr>
+            <p:ph type="subTitle" idx="1"/>
+          </p:nvPr>
+        </p:nvSpPr>
+        <p:spPr>
+          <a:xfrm>
+            <a:off x="1524000" y="3782291"/>
+            <a:ext cx="9144000" cy="1475508"/>
+          </a:xfrm>
+        </p:spPr>
+        <p:txBody>
+          <a:bodyPr>
+            <a:normAutofit/>
+          </a:bodyPr>
+          <a:lstStyle/>
+          <a:p>
+            <a:r>
+              <a:rPr lang="ru-RU" sz="3200" dirty="0">
+                <a:solidFill>
+                  <a:schemeClr val="bg1">
+                    <a:lumMod val="50000"/>
+                  </a:schemeClr>
+                </a:solidFill>
+              </a:rPr>
+              <a:t>Вопросы</a:t>
+            </a:r>
+            <a:endParaRPr lang="ru-RU" sz="3600" dirty="0">
+              <a:solidFill>
+                <a:schemeClr val="bg1">
+                  <a:lumMod val="50000"/>
+                </a:schemeClr>
+              </a:solidFill>
+            </a:endParaRPr>
+          </a:p>
+        </p:txBody>
+      </p:sp>
+    </p:spTree>
+    <p:extLst>
+      <p:ext uri="{BB962C8B-B14F-4D97-AF65-F5344CB8AC3E}">
+        <p14:creationId xmlns:p14="http://schemas.microsoft.com/office/powerpoint/2010/main" val="24964377"/>
       </p:ext>
     </p:extLst>
   </p:cSld>

--- a/Artifacts/Presentation.pptx
+++ b/Artifacts/Presentation.pptx
@@ -9,11 +9,12 @@
     <p:sldId id="257" r:id="rId3"/>
     <p:sldId id="262" r:id="rId4"/>
     <p:sldId id="258" r:id="rId5"/>
-    <p:sldId id="259" r:id="rId6"/>
-    <p:sldId id="261" r:id="rId7"/>
-    <p:sldId id="260" r:id="rId8"/>
-    <p:sldId id="263" r:id="rId9"/>
-    <p:sldId id="264" r:id="rId10"/>
+    <p:sldId id="265" r:id="rId6"/>
+    <p:sldId id="259" r:id="rId7"/>
+    <p:sldId id="261" r:id="rId8"/>
+    <p:sldId id="260" r:id="rId9"/>
+    <p:sldId id="263" r:id="rId10"/>
+    <p:sldId id="264" r:id="rId11"/>
   </p:sldIdLst>
   <p:sldSz cx="12192000" cy="6858000"/>
   <p:notesSz cx="6858000" cy="9144000"/>
@@ -267,7 +268,7 @@
           <a:p>
             <a:fld id="{CCE7983B-80E1-46EB-9963-C087A6E8390A}" type="datetimeFigureOut">
               <a:rPr lang="ru-RU" smtClean="0"/>
-              <a:t>10.06.2020</a:t>
+              <a:t>11.06.2020</a:t>
             </a:fld>
             <a:endParaRPr lang="ru-RU"/>
           </a:p>
@@ -465,7 +466,7 @@
           <a:p>
             <a:fld id="{CCE7983B-80E1-46EB-9963-C087A6E8390A}" type="datetimeFigureOut">
               <a:rPr lang="ru-RU" smtClean="0"/>
-              <a:t>10.06.2020</a:t>
+              <a:t>11.06.2020</a:t>
             </a:fld>
             <a:endParaRPr lang="ru-RU"/>
           </a:p>
@@ -673,7 +674,7 @@
           <a:p>
             <a:fld id="{CCE7983B-80E1-46EB-9963-C087A6E8390A}" type="datetimeFigureOut">
               <a:rPr lang="ru-RU" smtClean="0"/>
-              <a:t>10.06.2020</a:t>
+              <a:t>11.06.2020</a:t>
             </a:fld>
             <a:endParaRPr lang="ru-RU"/>
           </a:p>
@@ -871,7 +872,7 @@
           <a:p>
             <a:fld id="{CCE7983B-80E1-46EB-9963-C087A6E8390A}" type="datetimeFigureOut">
               <a:rPr lang="ru-RU" smtClean="0"/>
-              <a:t>10.06.2020</a:t>
+              <a:t>11.06.2020</a:t>
             </a:fld>
             <a:endParaRPr lang="ru-RU"/>
           </a:p>
@@ -1146,7 +1147,7 @@
           <a:p>
             <a:fld id="{CCE7983B-80E1-46EB-9963-C087A6E8390A}" type="datetimeFigureOut">
               <a:rPr lang="ru-RU" smtClean="0"/>
-              <a:t>10.06.2020</a:t>
+              <a:t>11.06.2020</a:t>
             </a:fld>
             <a:endParaRPr lang="ru-RU"/>
           </a:p>
@@ -1411,7 +1412,7 @@
           <a:p>
             <a:fld id="{CCE7983B-80E1-46EB-9963-C087A6E8390A}" type="datetimeFigureOut">
               <a:rPr lang="ru-RU" smtClean="0"/>
-              <a:t>10.06.2020</a:t>
+              <a:t>11.06.2020</a:t>
             </a:fld>
             <a:endParaRPr lang="ru-RU"/>
           </a:p>
@@ -1823,7 +1824,7 @@
           <a:p>
             <a:fld id="{CCE7983B-80E1-46EB-9963-C087A6E8390A}" type="datetimeFigureOut">
               <a:rPr lang="ru-RU" smtClean="0"/>
-              <a:t>10.06.2020</a:t>
+              <a:t>11.06.2020</a:t>
             </a:fld>
             <a:endParaRPr lang="ru-RU"/>
           </a:p>
@@ -1964,7 +1965,7 @@
           <a:p>
             <a:fld id="{CCE7983B-80E1-46EB-9963-C087A6E8390A}" type="datetimeFigureOut">
               <a:rPr lang="ru-RU" smtClean="0"/>
-              <a:t>10.06.2020</a:t>
+              <a:t>11.06.2020</a:t>
             </a:fld>
             <a:endParaRPr lang="ru-RU"/>
           </a:p>
@@ -2077,7 +2078,7 @@
           <a:p>
             <a:fld id="{CCE7983B-80E1-46EB-9963-C087A6E8390A}" type="datetimeFigureOut">
               <a:rPr lang="ru-RU" smtClean="0"/>
-              <a:t>10.06.2020</a:t>
+              <a:t>11.06.2020</a:t>
             </a:fld>
             <a:endParaRPr lang="ru-RU"/>
           </a:p>
@@ -2388,7 +2389,7 @@
           <a:p>
             <a:fld id="{CCE7983B-80E1-46EB-9963-C087A6E8390A}" type="datetimeFigureOut">
               <a:rPr lang="ru-RU" smtClean="0"/>
-              <a:t>10.06.2020</a:t>
+              <a:t>11.06.2020</a:t>
             </a:fld>
             <a:endParaRPr lang="ru-RU"/>
           </a:p>
@@ -2676,7 +2677,7 @@
           <a:p>
             <a:fld id="{CCE7983B-80E1-46EB-9963-C087A6E8390A}" type="datetimeFigureOut">
               <a:rPr lang="ru-RU" smtClean="0"/>
-              <a:t>10.06.2020</a:t>
+              <a:t>11.06.2020</a:t>
             </a:fld>
             <a:endParaRPr lang="ru-RU"/>
           </a:p>
@@ -2917,7 +2918,7 @@
           <a:p>
             <a:fld id="{CCE7983B-80E1-46EB-9963-C087A6E8390A}" type="datetimeFigureOut">
               <a:rPr lang="ru-RU" smtClean="0"/>
-              <a:t>10.06.2020</a:t>
+              <a:t>11.06.2020</a:t>
             </a:fld>
             <a:endParaRPr lang="ru-RU"/>
           </a:p>
@@ -3410,6 +3411,117 @@
 </p:sld>
 </file>
 
+<file path=ppt/slides/slide10.xml><?xml version="1.0" encoding="utf-8"?>
+<p:sld xmlns:a="http://schemas.openxmlformats.org/drawingml/2006/main" xmlns:r="http://schemas.openxmlformats.org/officeDocument/2006/relationships" xmlns:p="http://schemas.openxmlformats.org/presentationml/2006/main">
+  <p:cSld>
+    <p:spTree>
+      <p:nvGrpSpPr>
+        <p:cNvPr id="1" name=""/>
+        <p:cNvGrpSpPr/>
+        <p:nvPr/>
+      </p:nvGrpSpPr>
+      <p:grpSpPr>
+        <a:xfrm>
+          <a:off x="0" y="0"/>
+          <a:ext cx="0" cy="0"/>
+          <a:chOff x="0" y="0"/>
+          <a:chExt cx="0" cy="0"/>
+        </a:xfrm>
+      </p:grpSpPr>
+      <p:sp>
+        <p:nvSpPr>
+          <p:cNvPr id="2" name="Заголовок 1">
+            <a:extLst>
+              <a:ext uri="{FF2B5EF4-FFF2-40B4-BE49-F238E27FC236}">
+                <a16:creationId xmlns:a16="http://schemas.microsoft.com/office/drawing/2014/main" id="{5EBADAB6-E74B-4A07-9FCF-487C056E0FA8}"/>
+              </a:ext>
+            </a:extLst>
+          </p:cNvPr>
+          <p:cNvSpPr>
+            <a:spLocks noGrp="1"/>
+          </p:cNvSpPr>
+          <p:nvPr>
+            <p:ph type="ctrTitle"/>
+          </p:nvPr>
+        </p:nvSpPr>
+        <p:spPr>
+          <a:xfrm>
+            <a:off x="1524000" y="1108364"/>
+            <a:ext cx="9144000" cy="2401599"/>
+          </a:xfrm>
+        </p:spPr>
+        <p:txBody>
+          <a:bodyPr/>
+          <a:lstStyle/>
+          <a:p>
+            <a:r>
+              <a:rPr lang="ru-RU" dirty="0"/>
+              <a:t>Спасибо</a:t>
+            </a:r>
+          </a:p>
+        </p:txBody>
+      </p:sp>
+      <p:sp>
+        <p:nvSpPr>
+          <p:cNvPr id="3" name="Подзаголовок 2">
+            <a:extLst>
+              <a:ext uri="{FF2B5EF4-FFF2-40B4-BE49-F238E27FC236}">
+                <a16:creationId xmlns:a16="http://schemas.microsoft.com/office/drawing/2014/main" id="{77A894F1-5EE0-4426-86C4-DD7843F95E2C}"/>
+              </a:ext>
+            </a:extLst>
+          </p:cNvPr>
+          <p:cNvSpPr>
+            <a:spLocks noGrp="1"/>
+          </p:cNvSpPr>
+          <p:nvPr>
+            <p:ph type="subTitle" idx="1"/>
+          </p:nvPr>
+        </p:nvSpPr>
+        <p:spPr>
+          <a:xfrm>
+            <a:off x="1524000" y="3782291"/>
+            <a:ext cx="9144000" cy="1475508"/>
+          </a:xfrm>
+        </p:spPr>
+        <p:txBody>
+          <a:bodyPr>
+            <a:normAutofit/>
+          </a:bodyPr>
+          <a:lstStyle/>
+          <a:p>
+            <a:r>
+              <a:rPr lang="ru-RU" sz="3200" dirty="0">
+                <a:solidFill>
+                  <a:schemeClr val="bg1">
+                    <a:lumMod val="50000"/>
+                  </a:schemeClr>
+                </a:solidFill>
+              </a:rPr>
+              <a:t>Вопросы</a:t>
+            </a:r>
+            <a:endParaRPr lang="ru-RU" sz="3600" dirty="0">
+              <a:solidFill>
+                <a:schemeClr val="bg1">
+                  <a:lumMod val="50000"/>
+                </a:schemeClr>
+              </a:solidFill>
+            </a:endParaRPr>
+          </a:p>
+        </p:txBody>
+      </p:sp>
+    </p:spTree>
+    <p:extLst>
+      <p:ext uri="{BB962C8B-B14F-4D97-AF65-F5344CB8AC3E}">
+        <p14:creationId xmlns:p14="http://schemas.microsoft.com/office/powerpoint/2010/main" val="24964377"/>
+      </p:ext>
+    </p:extLst>
+  </p:cSld>
+  <p:clrMapOvr>
+    <a:masterClrMapping/>
+  </p:clrMapOvr>
+</p:sld>
+</file>
+
 <file path=ppt/slides/slide2.xml><?xml version="1.0" encoding="utf-8"?>
 <p:sld xmlns:a="http://schemas.openxmlformats.org/drawingml/2006/main" xmlns:r="http://schemas.openxmlformats.org/officeDocument/2006/relationships" xmlns:p="http://schemas.openxmlformats.org/presentationml/2006/main">
   <p:cSld>
@@ -3888,14 +4000,69 @@
         </p:blipFill>
         <p:spPr>
           <a:xfrm>
-            <a:off x="382136" y="113114"/>
-            <a:ext cx="11622643" cy="6744885"/>
+            <a:off x="507241" y="371431"/>
+            <a:ext cx="11177518" cy="6486569"/>
           </a:xfrm>
           <a:prstGeom prst="rect">
             <a:avLst/>
           </a:prstGeom>
         </p:spPr>
       </p:pic>
+      <p:sp>
+        <p:nvSpPr>
+          <p:cNvPr id="4" name="Заголовок 1">
+            <a:extLst>
+              <a:ext uri="{FF2B5EF4-FFF2-40B4-BE49-F238E27FC236}">
+                <a16:creationId xmlns:a16="http://schemas.microsoft.com/office/drawing/2014/main" id="{B2ADE6BF-E25D-4A58-B47C-D89E392F4321}"/>
+              </a:ext>
+            </a:extLst>
+          </p:cNvPr>
+          <p:cNvSpPr txBox="1">
+            <a:spLocks/>
+          </p:cNvSpPr>
+          <p:nvPr/>
+        </p:nvSpPr>
+        <p:spPr>
+          <a:xfrm>
+            <a:off x="838200" y="113114"/>
+            <a:ext cx="10515600" cy="150403"/>
+          </a:xfrm>
+          <a:prstGeom prst="rect">
+            <a:avLst/>
+          </a:prstGeom>
+        </p:spPr>
+        <p:txBody>
+          <a:bodyPr vert="horz" lIns="91440" tIns="45720" rIns="91440" bIns="45720" rtlCol="0" anchor="ctr">
+            <a:normAutofit fontScale="25000" lnSpcReduction="20000"/>
+          </a:bodyPr>
+          <a:lstStyle>
+            <a:lvl1pPr algn="l" defTabSz="914400" rtl="0" eaLnBrk="1" latinLnBrk="0" hangingPunct="1">
+              <a:lnSpc>
+                <a:spcPct val="90000"/>
+              </a:lnSpc>
+              <a:spcBef>
+                <a:spcPct val="0"/>
+              </a:spcBef>
+              <a:buNone/>
+              <a:defRPr sz="4400" kern="1200">
+                <a:solidFill>
+                  <a:schemeClr val="tx1"/>
+                </a:solidFill>
+                <a:latin typeface="+mj-lt"/>
+                <a:ea typeface="+mj-ea"/>
+                <a:cs typeface="+mj-cs"/>
+              </a:defRPr>
+            </a:lvl1pPr>
+          </a:lstStyle>
+          <a:p>
+            <a:pPr algn="ctr"/>
+            <a:r>
+              <a:rPr lang="ru-RU" b="1" dirty="0"/>
+              <a:t>Диаграмма компонентов сервера</a:t>
+            </a:r>
+          </a:p>
+        </p:txBody>
+      </p:sp>
     </p:spTree>
     <p:extLst>
       <p:ext uri="{BB962C8B-B14F-4D97-AF65-F5344CB8AC3E}">
@@ -3928,10 +4095,10 @@
       </p:grpSpPr>
       <p:pic>
         <p:nvPicPr>
-          <p:cNvPr id="5" name="Рисунок 4" descr="Изображение выглядит как карта&#10;&#10;Автоматически созданное описание">
-            <a:extLst>
-              <a:ext uri="{FF2B5EF4-FFF2-40B4-BE49-F238E27FC236}">
-                <a16:creationId xmlns:a16="http://schemas.microsoft.com/office/drawing/2014/main" id="{703088B6-0E56-489B-82A4-CEE62275CE1B}"/>
+          <p:cNvPr id="3" name="Рисунок 2" descr="Изображение выглядит как текст, карта&#10;&#10;Автоматически созданное описание">
+            <a:extLst>
+              <a:ext uri="{FF2B5EF4-FFF2-40B4-BE49-F238E27FC236}">
+                <a16:creationId xmlns:a16="http://schemas.microsoft.com/office/drawing/2014/main" id="{FBB7E11C-DD05-40C5-847E-EC257ACA54AD}"/>
               </a:ext>
             </a:extLst>
           </p:cNvPr>
@@ -3954,18 +4121,73 @@
         </p:blipFill>
         <p:spPr>
           <a:xfrm>
-            <a:off x="1328737" y="423862"/>
-            <a:ext cx="9534525" cy="6010275"/>
+            <a:off x="326409" y="432970"/>
+            <a:ext cx="11539182" cy="6425030"/>
           </a:xfrm>
           <a:prstGeom prst="rect">
             <a:avLst/>
           </a:prstGeom>
         </p:spPr>
       </p:pic>
+      <p:sp>
+        <p:nvSpPr>
+          <p:cNvPr id="4" name="Заголовок 1">
+            <a:extLst>
+              <a:ext uri="{FF2B5EF4-FFF2-40B4-BE49-F238E27FC236}">
+                <a16:creationId xmlns:a16="http://schemas.microsoft.com/office/drawing/2014/main" id="{11578CC6-17C1-461B-97B7-FAE8487C6F6B}"/>
+              </a:ext>
+            </a:extLst>
+          </p:cNvPr>
+          <p:cNvSpPr txBox="1">
+            <a:spLocks/>
+          </p:cNvSpPr>
+          <p:nvPr/>
+        </p:nvSpPr>
+        <p:spPr>
+          <a:xfrm>
+            <a:off x="838200" y="113114"/>
+            <a:ext cx="10515600" cy="150403"/>
+          </a:xfrm>
+          <a:prstGeom prst="rect">
+            <a:avLst/>
+          </a:prstGeom>
+        </p:spPr>
+        <p:txBody>
+          <a:bodyPr vert="horz" lIns="91440" tIns="45720" rIns="91440" bIns="45720" rtlCol="0" anchor="ctr">
+            <a:normAutofit fontScale="25000" lnSpcReduction="20000"/>
+          </a:bodyPr>
+          <a:lstStyle>
+            <a:lvl1pPr algn="l" defTabSz="914400" rtl="0" eaLnBrk="1" latinLnBrk="0" hangingPunct="1">
+              <a:lnSpc>
+                <a:spcPct val="90000"/>
+              </a:lnSpc>
+              <a:spcBef>
+                <a:spcPct val="0"/>
+              </a:spcBef>
+              <a:buNone/>
+              <a:defRPr sz="4400" kern="1200">
+                <a:solidFill>
+                  <a:schemeClr val="tx1"/>
+                </a:solidFill>
+                <a:latin typeface="+mj-lt"/>
+                <a:ea typeface="+mj-ea"/>
+                <a:cs typeface="+mj-cs"/>
+              </a:defRPr>
+            </a:lvl1pPr>
+          </a:lstStyle>
+          <a:p>
+            <a:pPr algn="ctr"/>
+            <a:r>
+              <a:rPr lang="ru-RU" b="1" dirty="0"/>
+              <a:t>Диаграмма компонентов клиента</a:t>
+            </a:r>
+          </a:p>
+        </p:txBody>
+      </p:sp>
     </p:spTree>
     <p:extLst>
       <p:ext uri="{BB962C8B-B14F-4D97-AF65-F5344CB8AC3E}">
-        <p14:creationId xmlns:p14="http://schemas.microsoft.com/office/powerpoint/2010/main" val="743655764"/>
+        <p14:creationId xmlns:p14="http://schemas.microsoft.com/office/powerpoint/2010/main" val="1539435353"/>
       </p:ext>
     </p:extLst>
   </p:cSld>
@@ -3994,10 +4216,10 @@
       </p:grpSpPr>
       <p:pic>
         <p:nvPicPr>
-          <p:cNvPr id="3" name="Рисунок 2" descr="Изображение выглядит как снимок экрана, карта&#10;&#10;Автоматически созданное описание">
-            <a:extLst>
-              <a:ext uri="{FF2B5EF4-FFF2-40B4-BE49-F238E27FC236}">
-                <a16:creationId xmlns:a16="http://schemas.microsoft.com/office/drawing/2014/main" id="{4D4CB138-DF5A-467E-9DF0-FB3D37F527C9}"/>
+          <p:cNvPr id="5" name="Рисунок 4" descr="Изображение выглядит как карта&#10;&#10;Автоматически созданное описание">
+            <a:extLst>
+              <a:ext uri="{FF2B5EF4-FFF2-40B4-BE49-F238E27FC236}">
+                <a16:creationId xmlns:a16="http://schemas.microsoft.com/office/drawing/2014/main" id="{703088B6-0E56-489B-82A4-CEE62275CE1B}"/>
               </a:ext>
             </a:extLst>
           </p:cNvPr>
@@ -4028,10 +4250,65 @@
           </a:prstGeom>
         </p:spPr>
       </p:pic>
+      <p:sp>
+        <p:nvSpPr>
+          <p:cNvPr id="3" name="Заголовок 1">
+            <a:extLst>
+              <a:ext uri="{FF2B5EF4-FFF2-40B4-BE49-F238E27FC236}">
+                <a16:creationId xmlns:a16="http://schemas.microsoft.com/office/drawing/2014/main" id="{0B30644D-DD93-4A34-B695-A0ED96DAB5DA}"/>
+              </a:ext>
+            </a:extLst>
+          </p:cNvPr>
+          <p:cNvSpPr txBox="1">
+            <a:spLocks/>
+          </p:cNvSpPr>
+          <p:nvPr/>
+        </p:nvSpPr>
+        <p:spPr>
+          <a:xfrm>
+            <a:off x="838200" y="113114"/>
+            <a:ext cx="10515600" cy="150403"/>
+          </a:xfrm>
+          <a:prstGeom prst="rect">
+            <a:avLst/>
+          </a:prstGeom>
+        </p:spPr>
+        <p:txBody>
+          <a:bodyPr vert="horz" lIns="91440" tIns="45720" rIns="91440" bIns="45720" rtlCol="0" anchor="ctr">
+            <a:normAutofit fontScale="25000" lnSpcReduction="20000"/>
+          </a:bodyPr>
+          <a:lstStyle>
+            <a:lvl1pPr algn="l" defTabSz="914400" rtl="0" eaLnBrk="1" latinLnBrk="0" hangingPunct="1">
+              <a:lnSpc>
+                <a:spcPct val="90000"/>
+              </a:lnSpc>
+              <a:spcBef>
+                <a:spcPct val="0"/>
+              </a:spcBef>
+              <a:buNone/>
+              <a:defRPr sz="4400" kern="1200">
+                <a:solidFill>
+                  <a:schemeClr val="tx1"/>
+                </a:solidFill>
+                <a:latin typeface="+mj-lt"/>
+                <a:ea typeface="+mj-ea"/>
+                <a:cs typeface="+mj-cs"/>
+              </a:defRPr>
+            </a:lvl1pPr>
+          </a:lstStyle>
+          <a:p>
+            <a:pPr algn="ctr"/>
+            <a:r>
+              <a:rPr lang="ru-RU" b="1" dirty="0"/>
+              <a:t>Диаграмма последовательности «Создание статьи»</a:t>
+            </a:r>
+          </a:p>
+        </p:txBody>
+      </p:sp>
     </p:spTree>
     <p:extLst>
       <p:ext uri="{BB962C8B-B14F-4D97-AF65-F5344CB8AC3E}">
-        <p14:creationId xmlns:p14="http://schemas.microsoft.com/office/powerpoint/2010/main" val="868582288"/>
+        <p14:creationId xmlns:p14="http://schemas.microsoft.com/office/powerpoint/2010/main" val="743655764"/>
       </p:ext>
     </p:extLst>
   </p:cSld>
@@ -4060,10 +4337,10 @@
       </p:grpSpPr>
       <p:pic>
         <p:nvPicPr>
-          <p:cNvPr id="4" name="Рисунок 3" descr="Изображение выглядит как карта&#10;&#10;Автоматически созданное описание">
-            <a:extLst>
-              <a:ext uri="{FF2B5EF4-FFF2-40B4-BE49-F238E27FC236}">
-                <a16:creationId xmlns:a16="http://schemas.microsoft.com/office/drawing/2014/main" id="{17C10F0C-6BB0-4224-BBAB-879BEFD5CB28}"/>
+          <p:cNvPr id="3" name="Рисунок 2" descr="Изображение выглядит как снимок экрана, карта&#10;&#10;Автоматически созданное описание">
+            <a:extLst>
+              <a:ext uri="{FF2B5EF4-FFF2-40B4-BE49-F238E27FC236}">
+                <a16:creationId xmlns:a16="http://schemas.microsoft.com/office/drawing/2014/main" id="{4D4CB138-DF5A-467E-9DF0-FB3D37F527C9}"/>
               </a:ext>
             </a:extLst>
           </p:cNvPr>
@@ -4094,10 +4371,65 @@
           </a:prstGeom>
         </p:spPr>
       </p:pic>
+      <p:sp>
+        <p:nvSpPr>
+          <p:cNvPr id="4" name="Заголовок 1">
+            <a:extLst>
+              <a:ext uri="{FF2B5EF4-FFF2-40B4-BE49-F238E27FC236}">
+                <a16:creationId xmlns:a16="http://schemas.microsoft.com/office/drawing/2014/main" id="{20EFE4B8-34BE-4406-AC91-55B88FE73934}"/>
+              </a:ext>
+            </a:extLst>
+          </p:cNvPr>
+          <p:cNvSpPr txBox="1">
+            <a:spLocks/>
+          </p:cNvSpPr>
+          <p:nvPr/>
+        </p:nvSpPr>
+        <p:spPr>
+          <a:xfrm>
+            <a:off x="838200" y="113114"/>
+            <a:ext cx="10515600" cy="150403"/>
+          </a:xfrm>
+          <a:prstGeom prst="rect">
+            <a:avLst/>
+          </a:prstGeom>
+        </p:spPr>
+        <p:txBody>
+          <a:bodyPr vert="horz" lIns="91440" tIns="45720" rIns="91440" bIns="45720" rtlCol="0" anchor="ctr">
+            <a:normAutofit fontScale="25000" lnSpcReduction="20000"/>
+          </a:bodyPr>
+          <a:lstStyle>
+            <a:lvl1pPr algn="l" defTabSz="914400" rtl="0" eaLnBrk="1" latinLnBrk="0" hangingPunct="1">
+              <a:lnSpc>
+                <a:spcPct val="90000"/>
+              </a:lnSpc>
+              <a:spcBef>
+                <a:spcPct val="0"/>
+              </a:spcBef>
+              <a:buNone/>
+              <a:defRPr sz="4400" kern="1200">
+                <a:solidFill>
+                  <a:schemeClr val="tx1"/>
+                </a:solidFill>
+                <a:latin typeface="+mj-lt"/>
+                <a:ea typeface="+mj-ea"/>
+                <a:cs typeface="+mj-cs"/>
+              </a:defRPr>
+            </a:lvl1pPr>
+          </a:lstStyle>
+          <a:p>
+            <a:pPr algn="ctr"/>
+            <a:r>
+              <a:rPr lang="ru-RU" b="1" dirty="0"/>
+              <a:t>Диаграмма последовательности «Обновление статьи»</a:t>
+            </a:r>
+          </a:p>
+        </p:txBody>
+      </p:sp>
     </p:spTree>
     <p:extLst>
       <p:ext uri="{BB962C8B-B14F-4D97-AF65-F5344CB8AC3E}">
-        <p14:creationId xmlns:p14="http://schemas.microsoft.com/office/powerpoint/2010/main" val="1009295973"/>
+        <p14:creationId xmlns:p14="http://schemas.microsoft.com/office/powerpoint/2010/main" val="868582288"/>
       </p:ext>
     </p:extLst>
   </p:cSld>
@@ -4124,35 +4456,71 @@
           <a:chExt cx="0" cy="0"/>
         </a:xfrm>
       </p:grpSpPr>
-      <p:sp>
-        <p:nvSpPr>
-          <p:cNvPr id="4" name="Заголовок 1">
-            <a:extLst>
-              <a:ext uri="{FF2B5EF4-FFF2-40B4-BE49-F238E27FC236}">
-                <a16:creationId xmlns:a16="http://schemas.microsoft.com/office/drawing/2014/main" id="{2DD2FC29-EFA1-446E-A34F-3645588B21EB}"/>
-              </a:ext>
-            </a:extLst>
-          </p:cNvPr>
-          <p:cNvSpPr txBox="1">
-            <a:spLocks/>
-          </p:cNvSpPr>
+      <p:pic>
+        <p:nvPicPr>
+          <p:cNvPr id="4" name="Рисунок 3" descr="Изображение выглядит как карта&#10;&#10;Автоматически созданное описание">
+            <a:extLst>
+              <a:ext uri="{FF2B5EF4-FFF2-40B4-BE49-F238E27FC236}">
+                <a16:creationId xmlns:a16="http://schemas.microsoft.com/office/drawing/2014/main" id="{17C10F0C-6BB0-4224-BBAB-879BEFD5CB28}"/>
+              </a:ext>
+            </a:extLst>
+          </p:cNvPr>
+          <p:cNvPicPr>
+            <a:picLocks noChangeAspect="1"/>
+          </p:cNvPicPr>
           <p:nvPr/>
-        </p:nvSpPr>
+        </p:nvPicPr>
+        <p:blipFill>
+          <a:blip r:embed="rId2">
+            <a:extLst>
+              <a:ext uri="{28A0092B-C50C-407E-A947-70E740481C1C}">
+                <a14:useLocalDpi xmlns:a14="http://schemas.microsoft.com/office/drawing/2010/main" val="0"/>
+              </a:ext>
+            </a:extLst>
+          </a:blip>
+          <a:stretch>
+            <a:fillRect/>
+          </a:stretch>
+        </p:blipFill>
         <p:spPr>
           <a:xfrm>
-            <a:off x="1524000" y="1108364"/>
-            <a:ext cx="9144000" cy="2401599"/>
+            <a:off x="1328737" y="423862"/>
+            <a:ext cx="9534525" cy="6010275"/>
           </a:xfrm>
           <a:prstGeom prst="rect">
             <a:avLst/>
           </a:prstGeom>
         </p:spPr>
-        <p:txBody>
-          <a:bodyPr vert="horz" lIns="91440" tIns="45720" rIns="91440" bIns="45720" rtlCol="0" anchor="b">
-            <a:normAutofit/>
+      </p:pic>
+      <p:sp>
+        <p:nvSpPr>
+          <p:cNvPr id="3" name="Заголовок 1">
+            <a:extLst>
+              <a:ext uri="{FF2B5EF4-FFF2-40B4-BE49-F238E27FC236}">
+                <a16:creationId xmlns:a16="http://schemas.microsoft.com/office/drawing/2014/main" id="{2E2CEF7B-A522-4B7C-8AA3-0594BAB4855B}"/>
+              </a:ext>
+            </a:extLst>
+          </p:cNvPr>
+          <p:cNvSpPr txBox="1">
+            <a:spLocks/>
+          </p:cNvSpPr>
+          <p:nvPr/>
+        </p:nvSpPr>
+        <p:spPr>
+          <a:xfrm>
+            <a:off x="838200" y="113114"/>
+            <a:ext cx="10515600" cy="150403"/>
+          </a:xfrm>
+          <a:prstGeom prst="rect">
+            <a:avLst/>
+          </a:prstGeom>
+        </p:spPr>
+        <p:txBody>
+          <a:bodyPr vert="horz" lIns="91440" tIns="45720" rIns="91440" bIns="45720" rtlCol="0" anchor="ctr">
+            <a:normAutofit fontScale="25000" lnSpcReduction="20000"/>
           </a:bodyPr>
           <a:lstStyle>
-            <a:lvl1pPr algn="ctr" defTabSz="914400" rtl="0" eaLnBrk="1" latinLnBrk="0" hangingPunct="1">
+            <a:lvl1pPr algn="l" defTabSz="914400" rtl="0" eaLnBrk="1" latinLnBrk="0" hangingPunct="1">
               <a:lnSpc>
                 <a:spcPct val="90000"/>
               </a:lnSpc>
@@ -4160,7 +4528,7 @@
                 <a:spcPct val="0"/>
               </a:spcBef>
               <a:buNone/>
-              <a:defRPr sz="6000" kern="1200">
+              <a:defRPr sz="4400" kern="1200">
                 <a:solidFill>
                   <a:schemeClr val="tx1"/>
                 </a:solidFill>
@@ -4171,81 +4539,18 @@
             </a:lvl1pPr>
           </a:lstStyle>
           <a:p>
-            <a:r>
-              <a:rPr lang="ru-RU" dirty="0"/>
-              <a:t>Демонстрация</a:t>
-            </a:r>
-          </a:p>
-        </p:txBody>
-      </p:sp>
-      <p:sp>
-        <p:nvSpPr>
-          <p:cNvPr id="5" name="Подзаголовок 2">
-            <a:extLst>
-              <a:ext uri="{FF2B5EF4-FFF2-40B4-BE49-F238E27FC236}">
-                <a16:creationId xmlns:a16="http://schemas.microsoft.com/office/drawing/2014/main" id="{D8193A43-38DC-4470-961D-7A1CA927806A}"/>
-              </a:ext>
-            </a:extLst>
-          </p:cNvPr>
-          <p:cNvSpPr>
-            <a:spLocks noGrp="1"/>
-          </p:cNvSpPr>
-          <p:nvPr>
-            <p:ph type="subTitle" idx="1"/>
-          </p:nvPr>
-        </p:nvSpPr>
-        <p:spPr>
-          <a:xfrm>
-            <a:off x="3657600" y="5429251"/>
-            <a:ext cx="8215313" cy="1074160"/>
-          </a:xfrm>
-        </p:spPr>
-        <p:txBody>
-          <a:bodyPr>
-            <a:normAutofit/>
-          </a:bodyPr>
-          <a:lstStyle/>
-          <a:p>
-            <a:pPr algn="r"/>
-            <a:r>
-              <a:rPr lang="ru-RU" dirty="0">
-                <a:solidFill>
-                  <a:schemeClr val="tx1">
-                    <a:lumMod val="65000"/>
-                    <a:lumOff val="35000"/>
-                  </a:schemeClr>
-                </a:solidFill>
-              </a:rPr>
-              <a:t>Исходный код</a:t>
-            </a:r>
-          </a:p>
-          <a:p>
-            <a:r>
-              <a:rPr lang="en-US" dirty="0">
-                <a:solidFill>
-                  <a:schemeClr val="tx1">
-                    <a:lumMod val="65000"/>
-                    <a:lumOff val="35000"/>
-                  </a:schemeClr>
-                </a:solidFill>
-              </a:rPr>
-              <a:t> https://github.com/HelenMakarchuk/Infotecs.Tasks/tree/Task_3</a:t>
-            </a:r>
-            <a:endParaRPr lang="ru-RU" dirty="0">
-              <a:solidFill>
-                <a:schemeClr val="tx1">
-                  <a:lumMod val="65000"/>
-                  <a:lumOff val="35000"/>
-                </a:schemeClr>
-              </a:solidFill>
-            </a:endParaRPr>
+            <a:pPr algn="ctr"/>
+            <a:r>
+              <a:rPr lang="ru-RU" b="1" dirty="0"/>
+              <a:t>Диаграмма последовательности «Удаление статьи»</a:t>
+            </a:r>
           </a:p>
         </p:txBody>
       </p:sp>
     </p:spTree>
     <p:extLst>
       <p:ext uri="{BB962C8B-B14F-4D97-AF65-F5344CB8AC3E}">
-        <p14:creationId xmlns:p14="http://schemas.microsoft.com/office/powerpoint/2010/main" val="4276060509"/>
+        <p14:creationId xmlns:p14="http://schemas.microsoft.com/office/powerpoint/2010/main" val="1009295973"/>
       </p:ext>
     </p:extLst>
   </p:cSld>
@@ -4274,43 +4579,64 @@
       </p:grpSpPr>
       <p:sp>
         <p:nvSpPr>
-          <p:cNvPr id="2" name="Заголовок 1">
-            <a:extLst>
-              <a:ext uri="{FF2B5EF4-FFF2-40B4-BE49-F238E27FC236}">
-                <a16:creationId xmlns:a16="http://schemas.microsoft.com/office/drawing/2014/main" id="{5EBADAB6-E74B-4A07-9FCF-487C056E0FA8}"/>
-              </a:ext>
-            </a:extLst>
-          </p:cNvPr>
-          <p:cNvSpPr>
-            <a:spLocks noGrp="1"/>
-          </p:cNvSpPr>
-          <p:nvPr>
-            <p:ph type="ctrTitle"/>
-          </p:nvPr>
+          <p:cNvPr id="4" name="Заголовок 1">
+            <a:extLst>
+              <a:ext uri="{FF2B5EF4-FFF2-40B4-BE49-F238E27FC236}">
+                <a16:creationId xmlns:a16="http://schemas.microsoft.com/office/drawing/2014/main" id="{2DD2FC29-EFA1-446E-A34F-3645588B21EB}"/>
+              </a:ext>
+            </a:extLst>
+          </p:cNvPr>
+          <p:cNvSpPr txBox="1">
+            <a:spLocks/>
+          </p:cNvSpPr>
+          <p:nvPr/>
         </p:nvSpPr>
         <p:spPr>
           <a:xfrm>
             <a:off x="1524000" y="1108364"/>
             <a:ext cx="9144000" cy="2401599"/>
           </a:xfrm>
+          <a:prstGeom prst="rect">
+            <a:avLst/>
+          </a:prstGeom>
         </p:spPr>
         <p:txBody>
-          <a:bodyPr/>
-          <a:lstStyle/>
+          <a:bodyPr vert="horz" lIns="91440" tIns="45720" rIns="91440" bIns="45720" rtlCol="0" anchor="b">
+            <a:normAutofit/>
+          </a:bodyPr>
+          <a:lstStyle>
+            <a:lvl1pPr algn="ctr" defTabSz="914400" rtl="0" eaLnBrk="1" latinLnBrk="0" hangingPunct="1">
+              <a:lnSpc>
+                <a:spcPct val="90000"/>
+              </a:lnSpc>
+              <a:spcBef>
+                <a:spcPct val="0"/>
+              </a:spcBef>
+              <a:buNone/>
+              <a:defRPr sz="6000" kern="1200">
+                <a:solidFill>
+                  <a:schemeClr val="tx1"/>
+                </a:solidFill>
+                <a:latin typeface="+mj-lt"/>
+                <a:ea typeface="+mj-ea"/>
+                <a:cs typeface="+mj-cs"/>
+              </a:defRPr>
+            </a:lvl1pPr>
+          </a:lstStyle>
           <a:p>
             <a:r>
               <a:rPr lang="ru-RU" dirty="0"/>
-              <a:t>Спасибо</a:t>
-            </a:r>
-          </a:p>
-        </p:txBody>
-      </p:sp>
-      <p:sp>
-        <p:nvSpPr>
-          <p:cNvPr id="3" name="Подзаголовок 2">
-            <a:extLst>
-              <a:ext uri="{FF2B5EF4-FFF2-40B4-BE49-F238E27FC236}">
-                <a16:creationId xmlns:a16="http://schemas.microsoft.com/office/drawing/2014/main" id="{77A894F1-5EE0-4426-86C4-DD7843F95E2C}"/>
+              <a:t>Демонстрация</a:t>
+            </a:r>
+          </a:p>
+        </p:txBody>
+      </p:sp>
+      <p:sp>
+        <p:nvSpPr>
+          <p:cNvPr id="5" name="Подзаголовок 2">
+            <a:extLst>
+              <a:ext uri="{FF2B5EF4-FFF2-40B4-BE49-F238E27FC236}">
+                <a16:creationId xmlns:a16="http://schemas.microsoft.com/office/drawing/2014/main" id="{D8193A43-38DC-4470-961D-7A1CA927806A}"/>
               </a:ext>
             </a:extLst>
           </p:cNvPr>
@@ -4323,8 +4649,8 @@
         </p:nvSpPr>
         <p:spPr>
           <a:xfrm>
-            <a:off x="1524000" y="3782291"/>
-            <a:ext cx="9144000" cy="1475508"/>
+            <a:off x="3657600" y="5429251"/>
+            <a:ext cx="8215313" cy="1074160"/>
           </a:xfrm>
         </p:spPr>
         <p:txBody>
@@ -4333,20 +4659,36 @@
           </a:bodyPr>
           <a:lstStyle/>
           <a:p>
-            <a:r>
-              <a:rPr lang="ru-RU" sz="3200" dirty="0">
+            <a:pPr algn="r"/>
+            <a:r>
+              <a:rPr lang="ru-RU" dirty="0">
                 <a:solidFill>
-                  <a:schemeClr val="bg1">
-                    <a:lumMod val="50000"/>
+                  <a:schemeClr val="tx1">
+                    <a:lumMod val="65000"/>
+                    <a:lumOff val="35000"/>
                   </a:schemeClr>
                 </a:solidFill>
               </a:rPr>
-              <a:t>Вопросы</a:t>
-            </a:r>
-            <a:endParaRPr lang="ru-RU" sz="3600" dirty="0">
+              <a:t>Исходный код</a:t>
+            </a:r>
+          </a:p>
+          <a:p>
+            <a:r>
+              <a:rPr lang="en-US" dirty="0">
+                <a:solidFill>
+                  <a:schemeClr val="tx1">
+                    <a:lumMod val="65000"/>
+                    <a:lumOff val="35000"/>
+                  </a:schemeClr>
+                </a:solidFill>
+              </a:rPr>
+              <a:t> https://github.com/HelenMakarchuk/Infotecs.Tasks/tree/Task_3</a:t>
+            </a:r>
+            <a:endParaRPr lang="ru-RU" dirty="0">
               <a:solidFill>
-                <a:schemeClr val="bg1">
-                  <a:lumMod val="50000"/>
+                <a:schemeClr val="tx1">
+                  <a:lumMod val="65000"/>
+                  <a:lumOff val="35000"/>
                 </a:schemeClr>
               </a:solidFill>
             </a:endParaRPr>
@@ -4356,7 +4698,7 @@
     </p:spTree>
     <p:extLst>
       <p:ext uri="{BB962C8B-B14F-4D97-AF65-F5344CB8AC3E}">
-        <p14:creationId xmlns:p14="http://schemas.microsoft.com/office/powerpoint/2010/main" val="24964377"/>
+        <p14:creationId xmlns:p14="http://schemas.microsoft.com/office/powerpoint/2010/main" val="4276060509"/>
       </p:ext>
     </p:extLst>
   </p:cSld>

--- a/Artifacts/Presentation.pptx
+++ b/Artifacts/Presentation.pptx
@@ -13,8 +13,9 @@
     <p:sldId id="259" r:id="rId7"/>
     <p:sldId id="261" r:id="rId8"/>
     <p:sldId id="260" r:id="rId9"/>
-    <p:sldId id="263" r:id="rId10"/>
-    <p:sldId id="264" r:id="rId11"/>
+    <p:sldId id="266" r:id="rId10"/>
+    <p:sldId id="263" r:id="rId11"/>
+    <p:sldId id="264" r:id="rId12"/>
   </p:sldIdLst>
   <p:sldSz cx="12192000" cy="6858000"/>
   <p:notesSz cx="6858000" cy="9144000"/>
@@ -268,7 +269,7 @@
           <a:p>
             <a:fld id="{CCE7983B-80E1-46EB-9963-C087A6E8390A}" type="datetimeFigureOut">
               <a:rPr lang="ru-RU" smtClean="0"/>
-              <a:t>11.06.2020</a:t>
+              <a:t>18.06.2020</a:t>
             </a:fld>
             <a:endParaRPr lang="ru-RU"/>
           </a:p>
@@ -466,7 +467,7 @@
           <a:p>
             <a:fld id="{CCE7983B-80E1-46EB-9963-C087A6E8390A}" type="datetimeFigureOut">
               <a:rPr lang="ru-RU" smtClean="0"/>
-              <a:t>11.06.2020</a:t>
+              <a:t>18.06.2020</a:t>
             </a:fld>
             <a:endParaRPr lang="ru-RU"/>
           </a:p>
@@ -674,7 +675,7 @@
           <a:p>
             <a:fld id="{CCE7983B-80E1-46EB-9963-C087A6E8390A}" type="datetimeFigureOut">
               <a:rPr lang="ru-RU" smtClean="0"/>
-              <a:t>11.06.2020</a:t>
+              <a:t>18.06.2020</a:t>
             </a:fld>
             <a:endParaRPr lang="ru-RU"/>
           </a:p>
@@ -872,7 +873,7 @@
           <a:p>
             <a:fld id="{CCE7983B-80E1-46EB-9963-C087A6E8390A}" type="datetimeFigureOut">
               <a:rPr lang="ru-RU" smtClean="0"/>
-              <a:t>11.06.2020</a:t>
+              <a:t>18.06.2020</a:t>
             </a:fld>
             <a:endParaRPr lang="ru-RU"/>
           </a:p>
@@ -1147,7 +1148,7 @@
           <a:p>
             <a:fld id="{CCE7983B-80E1-46EB-9963-C087A6E8390A}" type="datetimeFigureOut">
               <a:rPr lang="ru-RU" smtClean="0"/>
-              <a:t>11.06.2020</a:t>
+              <a:t>18.06.2020</a:t>
             </a:fld>
             <a:endParaRPr lang="ru-RU"/>
           </a:p>
@@ -1412,7 +1413,7 @@
           <a:p>
             <a:fld id="{CCE7983B-80E1-46EB-9963-C087A6E8390A}" type="datetimeFigureOut">
               <a:rPr lang="ru-RU" smtClean="0"/>
-              <a:t>11.06.2020</a:t>
+              <a:t>18.06.2020</a:t>
             </a:fld>
             <a:endParaRPr lang="ru-RU"/>
           </a:p>
@@ -1824,7 +1825,7 @@
           <a:p>
             <a:fld id="{CCE7983B-80E1-46EB-9963-C087A6E8390A}" type="datetimeFigureOut">
               <a:rPr lang="ru-RU" smtClean="0"/>
-              <a:t>11.06.2020</a:t>
+              <a:t>18.06.2020</a:t>
             </a:fld>
             <a:endParaRPr lang="ru-RU"/>
           </a:p>
@@ -1965,7 +1966,7 @@
           <a:p>
             <a:fld id="{CCE7983B-80E1-46EB-9963-C087A6E8390A}" type="datetimeFigureOut">
               <a:rPr lang="ru-RU" smtClean="0"/>
-              <a:t>11.06.2020</a:t>
+              <a:t>18.06.2020</a:t>
             </a:fld>
             <a:endParaRPr lang="ru-RU"/>
           </a:p>
@@ -2078,7 +2079,7 @@
           <a:p>
             <a:fld id="{CCE7983B-80E1-46EB-9963-C087A6E8390A}" type="datetimeFigureOut">
               <a:rPr lang="ru-RU" smtClean="0"/>
-              <a:t>11.06.2020</a:t>
+              <a:t>18.06.2020</a:t>
             </a:fld>
             <a:endParaRPr lang="ru-RU"/>
           </a:p>
@@ -2389,7 +2390,7 @@
           <a:p>
             <a:fld id="{CCE7983B-80E1-46EB-9963-C087A6E8390A}" type="datetimeFigureOut">
               <a:rPr lang="ru-RU" smtClean="0"/>
-              <a:t>11.06.2020</a:t>
+              <a:t>18.06.2020</a:t>
             </a:fld>
             <a:endParaRPr lang="ru-RU"/>
           </a:p>
@@ -2677,7 +2678,7 @@
           <a:p>
             <a:fld id="{CCE7983B-80E1-46EB-9963-C087A6E8390A}" type="datetimeFigureOut">
               <a:rPr lang="ru-RU" smtClean="0"/>
-              <a:t>11.06.2020</a:t>
+              <a:t>18.06.2020</a:t>
             </a:fld>
             <a:endParaRPr lang="ru-RU"/>
           </a:p>
@@ -2918,7 +2919,7 @@
           <a:p>
             <a:fld id="{CCE7983B-80E1-46EB-9963-C087A6E8390A}" type="datetimeFigureOut">
               <a:rPr lang="ru-RU" smtClean="0"/>
-              <a:t>11.06.2020</a:t>
+              <a:t>18.06.2020</a:t>
             </a:fld>
             <a:endParaRPr lang="ru-RU"/>
           </a:p>
@@ -3430,6 +3431,154 @@
       </p:grpSpPr>
       <p:sp>
         <p:nvSpPr>
+          <p:cNvPr id="4" name="Заголовок 1">
+            <a:extLst>
+              <a:ext uri="{FF2B5EF4-FFF2-40B4-BE49-F238E27FC236}">
+                <a16:creationId xmlns:a16="http://schemas.microsoft.com/office/drawing/2014/main" id="{2DD2FC29-EFA1-446E-A34F-3645588B21EB}"/>
+              </a:ext>
+            </a:extLst>
+          </p:cNvPr>
+          <p:cNvSpPr txBox="1">
+            <a:spLocks/>
+          </p:cNvSpPr>
+          <p:nvPr/>
+        </p:nvSpPr>
+        <p:spPr>
+          <a:xfrm>
+            <a:off x="1524000" y="1108364"/>
+            <a:ext cx="9144000" cy="2401599"/>
+          </a:xfrm>
+          <a:prstGeom prst="rect">
+            <a:avLst/>
+          </a:prstGeom>
+        </p:spPr>
+        <p:txBody>
+          <a:bodyPr vert="horz" lIns="91440" tIns="45720" rIns="91440" bIns="45720" rtlCol="0" anchor="b">
+            <a:normAutofit/>
+          </a:bodyPr>
+          <a:lstStyle>
+            <a:lvl1pPr algn="ctr" defTabSz="914400" rtl="0" eaLnBrk="1" latinLnBrk="0" hangingPunct="1">
+              <a:lnSpc>
+                <a:spcPct val="90000"/>
+              </a:lnSpc>
+              <a:spcBef>
+                <a:spcPct val="0"/>
+              </a:spcBef>
+              <a:buNone/>
+              <a:defRPr sz="6000" kern="1200">
+                <a:solidFill>
+                  <a:schemeClr val="tx1"/>
+                </a:solidFill>
+                <a:latin typeface="+mj-lt"/>
+                <a:ea typeface="+mj-ea"/>
+                <a:cs typeface="+mj-cs"/>
+              </a:defRPr>
+            </a:lvl1pPr>
+          </a:lstStyle>
+          <a:p>
+            <a:r>
+              <a:rPr lang="ru-RU" dirty="0"/>
+              <a:t>Демонстрация</a:t>
+            </a:r>
+          </a:p>
+        </p:txBody>
+      </p:sp>
+      <p:sp>
+        <p:nvSpPr>
+          <p:cNvPr id="5" name="Подзаголовок 2">
+            <a:extLst>
+              <a:ext uri="{FF2B5EF4-FFF2-40B4-BE49-F238E27FC236}">
+                <a16:creationId xmlns:a16="http://schemas.microsoft.com/office/drawing/2014/main" id="{D8193A43-38DC-4470-961D-7A1CA927806A}"/>
+              </a:ext>
+            </a:extLst>
+          </p:cNvPr>
+          <p:cNvSpPr>
+            <a:spLocks noGrp="1"/>
+          </p:cNvSpPr>
+          <p:nvPr>
+            <p:ph type="subTitle" idx="1"/>
+          </p:nvPr>
+        </p:nvSpPr>
+        <p:spPr>
+          <a:xfrm>
+            <a:off x="3657600" y="5429251"/>
+            <a:ext cx="8215313" cy="1074160"/>
+          </a:xfrm>
+        </p:spPr>
+        <p:txBody>
+          <a:bodyPr>
+            <a:normAutofit/>
+          </a:bodyPr>
+          <a:lstStyle/>
+          <a:p>
+            <a:pPr algn="r"/>
+            <a:r>
+              <a:rPr lang="ru-RU" dirty="0">
+                <a:solidFill>
+                  <a:schemeClr val="tx1">
+                    <a:lumMod val="65000"/>
+                    <a:lumOff val="35000"/>
+                  </a:schemeClr>
+                </a:solidFill>
+              </a:rPr>
+              <a:t>Исходный код</a:t>
+            </a:r>
+          </a:p>
+          <a:p>
+            <a:r>
+              <a:rPr lang="en-US" dirty="0">
+                <a:solidFill>
+                  <a:schemeClr val="tx1">
+                    <a:lumMod val="65000"/>
+                    <a:lumOff val="35000"/>
+                  </a:schemeClr>
+                </a:solidFill>
+              </a:rPr>
+              <a:t> https://github.com/HelenMakarchuk/Infotecs.Tasks/tree/Task_3</a:t>
+            </a:r>
+            <a:endParaRPr lang="ru-RU" dirty="0">
+              <a:solidFill>
+                <a:schemeClr val="tx1">
+                  <a:lumMod val="65000"/>
+                  <a:lumOff val="35000"/>
+                </a:schemeClr>
+              </a:solidFill>
+            </a:endParaRPr>
+          </a:p>
+        </p:txBody>
+      </p:sp>
+    </p:spTree>
+    <p:extLst>
+      <p:ext uri="{BB962C8B-B14F-4D97-AF65-F5344CB8AC3E}">
+        <p14:creationId xmlns:p14="http://schemas.microsoft.com/office/powerpoint/2010/main" val="4276060509"/>
+      </p:ext>
+    </p:extLst>
+  </p:cSld>
+  <p:clrMapOvr>
+    <a:masterClrMapping/>
+  </p:clrMapOvr>
+</p:sld>
+</file>
+
+<file path=ppt/slides/slide11.xml><?xml version="1.0" encoding="utf-8"?>
+<p:sld xmlns:a="http://schemas.openxmlformats.org/drawingml/2006/main" xmlns:r="http://schemas.openxmlformats.org/officeDocument/2006/relationships" xmlns:p="http://schemas.openxmlformats.org/presentationml/2006/main">
+  <p:cSld>
+    <p:spTree>
+      <p:nvGrpSpPr>
+        <p:cNvPr id="1" name=""/>
+        <p:cNvGrpSpPr/>
+        <p:nvPr/>
+      </p:nvGrpSpPr>
+      <p:grpSpPr>
+        <a:xfrm>
+          <a:off x="0" y="0"/>
+          <a:ext cx="0" cy="0"/>
+          <a:chOff x="0" y="0"/>
+          <a:chExt cx="0" cy="0"/>
+        </a:xfrm>
+      </p:grpSpPr>
+      <p:sp>
+        <p:nvSpPr>
           <p:cNvPr id="2" name="Заголовок 1">
             <a:extLst>
               <a:ext uri="{FF2B5EF4-FFF2-40B4-BE49-F238E27FC236}">
@@ -4214,12 +4363,67 @@
           <a:chExt cx="0" cy="0"/>
         </a:xfrm>
       </p:grpSpPr>
+      <p:sp>
+        <p:nvSpPr>
+          <p:cNvPr id="3" name="Заголовок 1">
+            <a:extLst>
+              <a:ext uri="{FF2B5EF4-FFF2-40B4-BE49-F238E27FC236}">
+                <a16:creationId xmlns:a16="http://schemas.microsoft.com/office/drawing/2014/main" id="{0B30644D-DD93-4A34-B695-A0ED96DAB5DA}"/>
+              </a:ext>
+            </a:extLst>
+          </p:cNvPr>
+          <p:cNvSpPr txBox="1">
+            <a:spLocks/>
+          </p:cNvSpPr>
+          <p:nvPr/>
+        </p:nvSpPr>
+        <p:spPr>
+          <a:xfrm>
+            <a:off x="838200" y="113114"/>
+            <a:ext cx="10515600" cy="150403"/>
+          </a:xfrm>
+          <a:prstGeom prst="rect">
+            <a:avLst/>
+          </a:prstGeom>
+        </p:spPr>
+        <p:txBody>
+          <a:bodyPr vert="horz" lIns="91440" tIns="45720" rIns="91440" bIns="45720" rtlCol="0" anchor="ctr">
+            <a:normAutofit fontScale="25000" lnSpcReduction="20000"/>
+          </a:bodyPr>
+          <a:lstStyle>
+            <a:lvl1pPr algn="l" defTabSz="914400" rtl="0" eaLnBrk="1" latinLnBrk="0" hangingPunct="1">
+              <a:lnSpc>
+                <a:spcPct val="90000"/>
+              </a:lnSpc>
+              <a:spcBef>
+                <a:spcPct val="0"/>
+              </a:spcBef>
+              <a:buNone/>
+              <a:defRPr sz="4400" kern="1200">
+                <a:solidFill>
+                  <a:schemeClr val="tx1"/>
+                </a:solidFill>
+                <a:latin typeface="+mj-lt"/>
+                <a:ea typeface="+mj-ea"/>
+                <a:cs typeface="+mj-cs"/>
+              </a:defRPr>
+            </a:lvl1pPr>
+          </a:lstStyle>
+          <a:p>
+            <a:pPr algn="ctr"/>
+            <a:r>
+              <a:rPr lang="ru-RU" b="1" dirty="0"/>
+              <a:t>Диаграмма последовательности «Создание статьи»</a:t>
+            </a:r>
+          </a:p>
+        </p:txBody>
+      </p:sp>
       <p:pic>
         <p:nvPicPr>
-          <p:cNvPr id="5" name="Рисунок 4" descr="Изображение выглядит как карта&#10;&#10;Автоматически созданное описание">
-            <a:extLst>
-              <a:ext uri="{FF2B5EF4-FFF2-40B4-BE49-F238E27FC236}">
-                <a16:creationId xmlns:a16="http://schemas.microsoft.com/office/drawing/2014/main" id="{703088B6-0E56-489B-82A4-CEE62275CE1B}"/>
+          <p:cNvPr id="4" name="Рисунок 3" descr="Изображение выглядит как карта&#10;&#10;Автоматически созданное описание">
+            <a:extLst>
+              <a:ext uri="{FF2B5EF4-FFF2-40B4-BE49-F238E27FC236}">
+                <a16:creationId xmlns:a16="http://schemas.microsoft.com/office/drawing/2014/main" id="{EF2B9186-FAD2-47C3-BB9F-C8583909CA5A}"/>
               </a:ext>
             </a:extLst>
           </p:cNvPr>
@@ -4250,61 +4454,6 @@
           </a:prstGeom>
         </p:spPr>
       </p:pic>
-      <p:sp>
-        <p:nvSpPr>
-          <p:cNvPr id="3" name="Заголовок 1">
-            <a:extLst>
-              <a:ext uri="{FF2B5EF4-FFF2-40B4-BE49-F238E27FC236}">
-                <a16:creationId xmlns:a16="http://schemas.microsoft.com/office/drawing/2014/main" id="{0B30644D-DD93-4A34-B695-A0ED96DAB5DA}"/>
-              </a:ext>
-            </a:extLst>
-          </p:cNvPr>
-          <p:cNvSpPr txBox="1">
-            <a:spLocks/>
-          </p:cNvSpPr>
-          <p:nvPr/>
-        </p:nvSpPr>
-        <p:spPr>
-          <a:xfrm>
-            <a:off x="838200" y="113114"/>
-            <a:ext cx="10515600" cy="150403"/>
-          </a:xfrm>
-          <a:prstGeom prst="rect">
-            <a:avLst/>
-          </a:prstGeom>
-        </p:spPr>
-        <p:txBody>
-          <a:bodyPr vert="horz" lIns="91440" tIns="45720" rIns="91440" bIns="45720" rtlCol="0" anchor="ctr">
-            <a:normAutofit fontScale="25000" lnSpcReduction="20000"/>
-          </a:bodyPr>
-          <a:lstStyle>
-            <a:lvl1pPr algn="l" defTabSz="914400" rtl="0" eaLnBrk="1" latinLnBrk="0" hangingPunct="1">
-              <a:lnSpc>
-                <a:spcPct val="90000"/>
-              </a:lnSpc>
-              <a:spcBef>
-                <a:spcPct val="0"/>
-              </a:spcBef>
-              <a:buNone/>
-              <a:defRPr sz="4400" kern="1200">
-                <a:solidFill>
-                  <a:schemeClr val="tx1"/>
-                </a:solidFill>
-                <a:latin typeface="+mj-lt"/>
-                <a:ea typeface="+mj-ea"/>
-                <a:cs typeface="+mj-cs"/>
-              </a:defRPr>
-            </a:lvl1pPr>
-          </a:lstStyle>
-          <a:p>
-            <a:pPr algn="ctr"/>
-            <a:r>
-              <a:rPr lang="ru-RU" b="1" dirty="0"/>
-              <a:t>Диаграмма последовательности «Создание статьи»</a:t>
-            </a:r>
-          </a:p>
-        </p:txBody>
-      </p:sp>
     </p:spTree>
     <p:extLst>
       <p:ext uri="{BB962C8B-B14F-4D97-AF65-F5344CB8AC3E}">
@@ -4335,12 +4484,67 @@
           <a:chExt cx="0" cy="0"/>
         </a:xfrm>
       </p:grpSpPr>
+      <p:sp>
+        <p:nvSpPr>
+          <p:cNvPr id="4" name="Заголовок 1">
+            <a:extLst>
+              <a:ext uri="{FF2B5EF4-FFF2-40B4-BE49-F238E27FC236}">
+                <a16:creationId xmlns:a16="http://schemas.microsoft.com/office/drawing/2014/main" id="{20EFE4B8-34BE-4406-AC91-55B88FE73934}"/>
+              </a:ext>
+            </a:extLst>
+          </p:cNvPr>
+          <p:cNvSpPr txBox="1">
+            <a:spLocks/>
+          </p:cNvSpPr>
+          <p:nvPr/>
+        </p:nvSpPr>
+        <p:spPr>
+          <a:xfrm>
+            <a:off x="838200" y="113114"/>
+            <a:ext cx="10515600" cy="150403"/>
+          </a:xfrm>
+          <a:prstGeom prst="rect">
+            <a:avLst/>
+          </a:prstGeom>
+        </p:spPr>
+        <p:txBody>
+          <a:bodyPr vert="horz" lIns="91440" tIns="45720" rIns="91440" bIns="45720" rtlCol="0" anchor="ctr">
+            <a:normAutofit fontScale="25000" lnSpcReduction="20000"/>
+          </a:bodyPr>
+          <a:lstStyle>
+            <a:lvl1pPr algn="l" defTabSz="914400" rtl="0" eaLnBrk="1" latinLnBrk="0" hangingPunct="1">
+              <a:lnSpc>
+                <a:spcPct val="90000"/>
+              </a:lnSpc>
+              <a:spcBef>
+                <a:spcPct val="0"/>
+              </a:spcBef>
+              <a:buNone/>
+              <a:defRPr sz="4400" kern="1200">
+                <a:solidFill>
+                  <a:schemeClr val="tx1"/>
+                </a:solidFill>
+                <a:latin typeface="+mj-lt"/>
+                <a:ea typeface="+mj-ea"/>
+                <a:cs typeface="+mj-cs"/>
+              </a:defRPr>
+            </a:lvl1pPr>
+          </a:lstStyle>
+          <a:p>
+            <a:pPr algn="ctr"/>
+            <a:r>
+              <a:rPr lang="ru-RU" b="1" dirty="0"/>
+              <a:t>Диаграмма последовательности «Обновление статьи»</a:t>
+            </a:r>
+          </a:p>
+        </p:txBody>
+      </p:sp>
       <p:pic>
         <p:nvPicPr>
-          <p:cNvPr id="3" name="Рисунок 2" descr="Изображение выглядит как снимок экрана, карта&#10;&#10;Автоматически созданное описание">
-            <a:extLst>
-              <a:ext uri="{FF2B5EF4-FFF2-40B4-BE49-F238E27FC236}">
-                <a16:creationId xmlns:a16="http://schemas.microsoft.com/office/drawing/2014/main" id="{4D4CB138-DF5A-467E-9DF0-FB3D37F527C9}"/>
+          <p:cNvPr id="5" name="Рисунок 4" descr="Изображение выглядит как снимок экрана, карта&#10;&#10;Автоматически созданное описание">
+            <a:extLst>
+              <a:ext uri="{FF2B5EF4-FFF2-40B4-BE49-F238E27FC236}">
+                <a16:creationId xmlns:a16="http://schemas.microsoft.com/office/drawing/2014/main" id="{3CA9D91B-48D4-4164-99C4-EF87348D51B0}"/>
               </a:ext>
             </a:extLst>
           </p:cNvPr>
@@ -4371,61 +4575,6 @@
           </a:prstGeom>
         </p:spPr>
       </p:pic>
-      <p:sp>
-        <p:nvSpPr>
-          <p:cNvPr id="4" name="Заголовок 1">
-            <a:extLst>
-              <a:ext uri="{FF2B5EF4-FFF2-40B4-BE49-F238E27FC236}">
-                <a16:creationId xmlns:a16="http://schemas.microsoft.com/office/drawing/2014/main" id="{20EFE4B8-34BE-4406-AC91-55B88FE73934}"/>
-              </a:ext>
-            </a:extLst>
-          </p:cNvPr>
-          <p:cNvSpPr txBox="1">
-            <a:spLocks/>
-          </p:cNvSpPr>
-          <p:nvPr/>
-        </p:nvSpPr>
-        <p:spPr>
-          <a:xfrm>
-            <a:off x="838200" y="113114"/>
-            <a:ext cx="10515600" cy="150403"/>
-          </a:xfrm>
-          <a:prstGeom prst="rect">
-            <a:avLst/>
-          </a:prstGeom>
-        </p:spPr>
-        <p:txBody>
-          <a:bodyPr vert="horz" lIns="91440" tIns="45720" rIns="91440" bIns="45720" rtlCol="0" anchor="ctr">
-            <a:normAutofit fontScale="25000" lnSpcReduction="20000"/>
-          </a:bodyPr>
-          <a:lstStyle>
-            <a:lvl1pPr algn="l" defTabSz="914400" rtl="0" eaLnBrk="1" latinLnBrk="0" hangingPunct="1">
-              <a:lnSpc>
-                <a:spcPct val="90000"/>
-              </a:lnSpc>
-              <a:spcBef>
-                <a:spcPct val="0"/>
-              </a:spcBef>
-              <a:buNone/>
-              <a:defRPr sz="4400" kern="1200">
-                <a:solidFill>
-                  <a:schemeClr val="tx1"/>
-                </a:solidFill>
-                <a:latin typeface="+mj-lt"/>
-                <a:ea typeface="+mj-ea"/>
-                <a:cs typeface="+mj-cs"/>
-              </a:defRPr>
-            </a:lvl1pPr>
-          </a:lstStyle>
-          <a:p>
-            <a:pPr algn="ctr"/>
-            <a:r>
-              <a:rPr lang="ru-RU" b="1" dirty="0"/>
-              <a:t>Диаграмма последовательности «Обновление статьи»</a:t>
-            </a:r>
-          </a:p>
-        </p:txBody>
-      </p:sp>
     </p:spTree>
     <p:extLst>
       <p:ext uri="{BB962C8B-B14F-4D97-AF65-F5344CB8AC3E}">
@@ -4456,12 +4605,67 @@
           <a:chExt cx="0" cy="0"/>
         </a:xfrm>
       </p:grpSpPr>
+      <p:sp>
+        <p:nvSpPr>
+          <p:cNvPr id="3" name="Заголовок 1">
+            <a:extLst>
+              <a:ext uri="{FF2B5EF4-FFF2-40B4-BE49-F238E27FC236}">
+                <a16:creationId xmlns:a16="http://schemas.microsoft.com/office/drawing/2014/main" id="{2E2CEF7B-A522-4B7C-8AA3-0594BAB4855B}"/>
+              </a:ext>
+            </a:extLst>
+          </p:cNvPr>
+          <p:cNvSpPr txBox="1">
+            <a:spLocks/>
+          </p:cNvSpPr>
+          <p:nvPr/>
+        </p:nvSpPr>
+        <p:spPr>
+          <a:xfrm>
+            <a:off x="838200" y="113114"/>
+            <a:ext cx="10515600" cy="150403"/>
+          </a:xfrm>
+          <a:prstGeom prst="rect">
+            <a:avLst/>
+          </a:prstGeom>
+        </p:spPr>
+        <p:txBody>
+          <a:bodyPr vert="horz" lIns="91440" tIns="45720" rIns="91440" bIns="45720" rtlCol="0" anchor="ctr">
+            <a:normAutofit fontScale="25000" lnSpcReduction="20000"/>
+          </a:bodyPr>
+          <a:lstStyle>
+            <a:lvl1pPr algn="l" defTabSz="914400" rtl="0" eaLnBrk="1" latinLnBrk="0" hangingPunct="1">
+              <a:lnSpc>
+                <a:spcPct val="90000"/>
+              </a:lnSpc>
+              <a:spcBef>
+                <a:spcPct val="0"/>
+              </a:spcBef>
+              <a:buNone/>
+              <a:defRPr sz="4400" kern="1200">
+                <a:solidFill>
+                  <a:schemeClr val="tx1"/>
+                </a:solidFill>
+                <a:latin typeface="+mj-lt"/>
+                <a:ea typeface="+mj-ea"/>
+                <a:cs typeface="+mj-cs"/>
+              </a:defRPr>
+            </a:lvl1pPr>
+          </a:lstStyle>
+          <a:p>
+            <a:pPr algn="ctr"/>
+            <a:r>
+              <a:rPr lang="ru-RU" b="1" dirty="0"/>
+              <a:t>Диаграмма последовательности «Удаление статьи»</a:t>
+            </a:r>
+          </a:p>
+        </p:txBody>
+      </p:sp>
       <p:pic>
         <p:nvPicPr>
-          <p:cNvPr id="4" name="Рисунок 3" descr="Изображение выглядит как карта&#10;&#10;Автоматически созданное описание">
-            <a:extLst>
-              <a:ext uri="{FF2B5EF4-FFF2-40B4-BE49-F238E27FC236}">
-                <a16:creationId xmlns:a16="http://schemas.microsoft.com/office/drawing/2014/main" id="{17C10F0C-6BB0-4224-BBAB-879BEFD5CB28}"/>
+          <p:cNvPr id="5" name="Рисунок 4" descr="Изображение выглядит как карта&#10;&#10;Автоматически созданное описание">
+            <a:extLst>
+              <a:ext uri="{FF2B5EF4-FFF2-40B4-BE49-F238E27FC236}">
+                <a16:creationId xmlns:a16="http://schemas.microsoft.com/office/drawing/2014/main" id="{D47A3476-2410-4C6E-8A15-9462DC00BD1B}"/>
               </a:ext>
             </a:extLst>
           </p:cNvPr>
@@ -4492,61 +4696,6 @@
           </a:prstGeom>
         </p:spPr>
       </p:pic>
-      <p:sp>
-        <p:nvSpPr>
-          <p:cNvPr id="3" name="Заголовок 1">
-            <a:extLst>
-              <a:ext uri="{FF2B5EF4-FFF2-40B4-BE49-F238E27FC236}">
-                <a16:creationId xmlns:a16="http://schemas.microsoft.com/office/drawing/2014/main" id="{2E2CEF7B-A522-4B7C-8AA3-0594BAB4855B}"/>
-              </a:ext>
-            </a:extLst>
-          </p:cNvPr>
-          <p:cNvSpPr txBox="1">
-            <a:spLocks/>
-          </p:cNvSpPr>
-          <p:nvPr/>
-        </p:nvSpPr>
-        <p:spPr>
-          <a:xfrm>
-            <a:off x="838200" y="113114"/>
-            <a:ext cx="10515600" cy="150403"/>
-          </a:xfrm>
-          <a:prstGeom prst="rect">
-            <a:avLst/>
-          </a:prstGeom>
-        </p:spPr>
-        <p:txBody>
-          <a:bodyPr vert="horz" lIns="91440" tIns="45720" rIns="91440" bIns="45720" rtlCol="0" anchor="ctr">
-            <a:normAutofit fontScale="25000" lnSpcReduction="20000"/>
-          </a:bodyPr>
-          <a:lstStyle>
-            <a:lvl1pPr algn="l" defTabSz="914400" rtl="0" eaLnBrk="1" latinLnBrk="0" hangingPunct="1">
-              <a:lnSpc>
-                <a:spcPct val="90000"/>
-              </a:lnSpc>
-              <a:spcBef>
-                <a:spcPct val="0"/>
-              </a:spcBef>
-              <a:buNone/>
-              <a:defRPr sz="4400" kern="1200">
-                <a:solidFill>
-                  <a:schemeClr val="tx1"/>
-                </a:solidFill>
-                <a:latin typeface="+mj-lt"/>
-                <a:ea typeface="+mj-ea"/>
-                <a:cs typeface="+mj-cs"/>
-              </a:defRPr>
-            </a:lvl1pPr>
-          </a:lstStyle>
-          <a:p>
-            <a:pPr algn="ctr"/>
-            <a:r>
-              <a:rPr lang="ru-RU" b="1" dirty="0"/>
-              <a:t>Диаграмма последовательности «Удаление статьи»</a:t>
-            </a:r>
-          </a:p>
-        </p:txBody>
-      </p:sp>
     </p:spTree>
     <p:extLst>
       <p:ext uri="{BB962C8B-B14F-4D97-AF65-F5344CB8AC3E}">
@@ -4579,10 +4728,10 @@
       </p:grpSpPr>
       <p:sp>
         <p:nvSpPr>
-          <p:cNvPr id="4" name="Заголовок 1">
-            <a:extLst>
-              <a:ext uri="{FF2B5EF4-FFF2-40B4-BE49-F238E27FC236}">
-                <a16:creationId xmlns:a16="http://schemas.microsoft.com/office/drawing/2014/main" id="{2DD2FC29-EFA1-446E-A34F-3645588B21EB}"/>
+          <p:cNvPr id="2" name="Заголовок 1">
+            <a:extLst>
+              <a:ext uri="{FF2B5EF4-FFF2-40B4-BE49-F238E27FC236}">
+                <a16:creationId xmlns:a16="http://schemas.microsoft.com/office/drawing/2014/main" id="{80074A69-4FAA-4252-8463-69CF269DC1EB}"/>
               </a:ext>
             </a:extLst>
           </p:cNvPr>
@@ -4593,19 +4742,19 @@
         </p:nvSpPr>
         <p:spPr>
           <a:xfrm>
-            <a:off x="1524000" y="1108364"/>
-            <a:ext cx="9144000" cy="2401599"/>
+            <a:off x="838200" y="113114"/>
+            <a:ext cx="10515600" cy="150403"/>
           </a:xfrm>
           <a:prstGeom prst="rect">
             <a:avLst/>
           </a:prstGeom>
         </p:spPr>
         <p:txBody>
-          <a:bodyPr vert="horz" lIns="91440" tIns="45720" rIns="91440" bIns="45720" rtlCol="0" anchor="b">
-            <a:normAutofit/>
+          <a:bodyPr vert="horz" lIns="91440" tIns="45720" rIns="91440" bIns="45720" rtlCol="0" anchor="ctr">
+            <a:normAutofit fontScale="25000" lnSpcReduction="20000"/>
           </a:bodyPr>
           <a:lstStyle>
-            <a:lvl1pPr algn="ctr" defTabSz="914400" rtl="0" eaLnBrk="1" latinLnBrk="0" hangingPunct="1">
+            <a:lvl1pPr algn="l" defTabSz="914400" rtl="0" eaLnBrk="1" latinLnBrk="0" hangingPunct="1">
               <a:lnSpc>
                 <a:spcPct val="90000"/>
               </a:lnSpc>
@@ -4613,7 +4762,7 @@
                 <a:spcPct val="0"/>
               </a:spcBef>
               <a:buNone/>
-              <a:defRPr sz="6000" kern="1200">
+              <a:defRPr sz="4400" kern="1200">
                 <a:solidFill>
                   <a:schemeClr val="tx1"/>
                 </a:solidFill>
@@ -4624,81 +4773,55 @@
             </a:lvl1pPr>
           </a:lstStyle>
           <a:p>
-            <a:r>
-              <a:rPr lang="ru-RU" dirty="0"/>
-              <a:t>Демонстрация</a:t>
-            </a:r>
-          </a:p>
-        </p:txBody>
-      </p:sp>
-      <p:sp>
-        <p:nvSpPr>
-          <p:cNvPr id="5" name="Подзаголовок 2">
-            <a:extLst>
-              <a:ext uri="{FF2B5EF4-FFF2-40B4-BE49-F238E27FC236}">
-                <a16:creationId xmlns:a16="http://schemas.microsoft.com/office/drawing/2014/main" id="{D8193A43-38DC-4470-961D-7A1CA927806A}"/>
-              </a:ext>
-            </a:extLst>
-          </p:cNvPr>
-          <p:cNvSpPr>
-            <a:spLocks noGrp="1"/>
-          </p:cNvSpPr>
-          <p:nvPr>
-            <p:ph type="subTitle" idx="1"/>
-          </p:nvPr>
-        </p:nvSpPr>
+            <a:pPr algn="ctr"/>
+            <a:r>
+              <a:rPr lang="ru-RU" b="1"/>
+              <a:t>Диаграмма последовательности «Создание комментария»</a:t>
+            </a:r>
+            <a:endParaRPr lang="ru-RU" b="1" dirty="0"/>
+          </a:p>
+        </p:txBody>
+      </p:sp>
+      <p:pic>
+        <p:nvPicPr>
+          <p:cNvPr id="5" name="Рисунок 4" descr="Изображение выглядит как карта&#10;&#10;Автоматически созданное описание">
+            <a:extLst>
+              <a:ext uri="{FF2B5EF4-FFF2-40B4-BE49-F238E27FC236}">
+                <a16:creationId xmlns:a16="http://schemas.microsoft.com/office/drawing/2014/main" id="{A8A31E1E-E6C2-4A98-9AF7-8BFDAA038CE7}"/>
+              </a:ext>
+            </a:extLst>
+          </p:cNvPr>
+          <p:cNvPicPr>
+            <a:picLocks noChangeAspect="1"/>
+          </p:cNvPicPr>
+          <p:nvPr/>
+        </p:nvPicPr>
+        <p:blipFill>
+          <a:blip r:embed="rId2">
+            <a:extLst>
+              <a:ext uri="{28A0092B-C50C-407E-A947-70E740481C1C}">
+                <a14:useLocalDpi xmlns:a14="http://schemas.microsoft.com/office/drawing/2010/main" val="0"/>
+              </a:ext>
+            </a:extLst>
+          </a:blip>
+          <a:stretch>
+            <a:fillRect/>
+          </a:stretch>
+        </p:blipFill>
         <p:spPr>
           <a:xfrm>
-            <a:off x="3657600" y="5429251"/>
-            <a:ext cx="8215313" cy="1074160"/>
+            <a:off x="1328737" y="423862"/>
+            <a:ext cx="9534525" cy="6010275"/>
           </a:xfrm>
+          <a:prstGeom prst="rect">
+            <a:avLst/>
+          </a:prstGeom>
         </p:spPr>
-        <p:txBody>
-          <a:bodyPr>
-            <a:normAutofit/>
-          </a:bodyPr>
-          <a:lstStyle/>
-          <a:p>
-            <a:pPr algn="r"/>
-            <a:r>
-              <a:rPr lang="ru-RU" dirty="0">
-                <a:solidFill>
-                  <a:schemeClr val="tx1">
-                    <a:lumMod val="65000"/>
-                    <a:lumOff val="35000"/>
-                  </a:schemeClr>
-                </a:solidFill>
-              </a:rPr>
-              <a:t>Исходный код</a:t>
-            </a:r>
-          </a:p>
-          <a:p>
-            <a:r>
-              <a:rPr lang="en-US" dirty="0">
-                <a:solidFill>
-                  <a:schemeClr val="tx1">
-                    <a:lumMod val="65000"/>
-                    <a:lumOff val="35000"/>
-                  </a:schemeClr>
-                </a:solidFill>
-              </a:rPr>
-              <a:t> https://github.com/HelenMakarchuk/Infotecs.Tasks/tree/Task_3</a:t>
-            </a:r>
-            <a:endParaRPr lang="ru-RU" dirty="0">
-              <a:solidFill>
-                <a:schemeClr val="tx1">
-                  <a:lumMod val="65000"/>
-                  <a:lumOff val="35000"/>
-                </a:schemeClr>
-              </a:solidFill>
-            </a:endParaRPr>
-          </a:p>
-        </p:txBody>
-      </p:sp>
+      </p:pic>
     </p:spTree>
     <p:extLst>
       <p:ext uri="{BB962C8B-B14F-4D97-AF65-F5344CB8AC3E}">
-        <p14:creationId xmlns:p14="http://schemas.microsoft.com/office/powerpoint/2010/main" val="4276060509"/>
+        <p14:creationId xmlns:p14="http://schemas.microsoft.com/office/powerpoint/2010/main" val="3173181186"/>
       </p:ext>
     </p:extLst>
   </p:cSld>
